--- a/Lec_3/Lec_3_Модуль 3_1_Слайд-конспект.pptx
+++ b/Lec_3/Lec_3_Модуль 3_1_Слайд-конспект.pptx
@@ -5,21 +5,22 @@
     <p:sldMasterId id="2147483648" r:id="rId1"/>
   </p:sldMasterIdLst>
   <p:notesMasterIdLst>
-    <p:notesMasterId r:id="rId14"/>
+    <p:notesMasterId r:id="rId15"/>
   </p:notesMasterIdLst>
   <p:sldIdLst>
     <p:sldId id="256" r:id="rId2"/>
     <p:sldId id="258" r:id="rId3"/>
-    <p:sldId id="259" r:id="rId4"/>
-    <p:sldId id="260" r:id="rId5"/>
-    <p:sldId id="261" r:id="rId6"/>
-    <p:sldId id="262" r:id="rId7"/>
-    <p:sldId id="263" r:id="rId8"/>
-    <p:sldId id="264" r:id="rId9"/>
-    <p:sldId id="265" r:id="rId10"/>
-    <p:sldId id="266" r:id="rId11"/>
-    <p:sldId id="268" r:id="rId12"/>
-    <p:sldId id="269" r:id="rId13"/>
+    <p:sldId id="270" r:id="rId4"/>
+    <p:sldId id="259" r:id="rId5"/>
+    <p:sldId id="260" r:id="rId6"/>
+    <p:sldId id="261" r:id="rId7"/>
+    <p:sldId id="262" r:id="rId8"/>
+    <p:sldId id="263" r:id="rId9"/>
+    <p:sldId id="264" r:id="rId10"/>
+    <p:sldId id="265" r:id="rId11"/>
+    <p:sldId id="266" r:id="rId12"/>
+    <p:sldId id="268" r:id="rId13"/>
+    <p:sldId id="269" r:id="rId14"/>
   </p:sldIdLst>
   <p:sldSz cx="9144000" cy="5143500" type="screen16x9"/>
   <p:notesSz cx="6858000" cy="9144000"/>
@@ -3712,7 +3713,7 @@
               <a:buNone/>
             </a:pPr>
             <a:r>
-              <a:t>Частые ошибки</a:t>
+              <a:t>Пересмотр</a:t>
             </a:r>
           </a:p>
         </p:txBody>
@@ -3732,39 +3733,57 @@
           <a:bodyPr/>
           <a:lstStyle/>
           <a:p>
+            <a:pPr marL="0" lvl="0" indent="0">
+              <a:buNone/>
+            </a:pPr>
+            <a:r>
+              <a:t>Пересмотр запускается не только календарной датой.</a:t>
+            </a:r>
+          </a:p>
+          <a:p>
+            <a:pPr marL="0" lvl="0" indent="0">
+              <a:buNone/>
+            </a:pPr>
+            <a:r>
+              <a:t>Триггеры могут включать:</a:t>
+            </a:r>
+          </a:p>
+          <a:p>
             <a:pPr lvl="0"/>
             <a:r>
-              <a:t>Начинать расчёт без подтверждённой применимости и границы объекта.</a:t>
+              <a:t>изменение границ, функции или владельца объекта;</a:t>
             </a:r>
           </a:p>
           <a:p>
             <a:pPr lvl="0"/>
             <a:r>
-              <a:t>Сопоставлять только название системы с названием типового объекта.</a:t>
+              <a:t>изменение пользователей, взаимосвязей или масштаба последствий;</a:t>
             </a:r>
           </a:p>
           <a:p>
             <a:pPr lvl="0"/>
             <a:r>
-              <a:t>Подменять данные о последствиях оценочным мнением.</a:t>
+              <a:t>изменение показателей, правил или отраслевых особенностей;</a:t>
             </a:r>
           </a:p>
           <a:p>
             <a:pPr lvl="0"/>
             <a:r>
-              <a:t>Присваивать категорию при неустранённом существенном пробеле.</a:t>
+              <a:t>создание нового объекта или изменение типового перечня;</a:t>
             </a:r>
           </a:p>
           <a:p>
             <a:pPr lvl="0"/>
             <a:r>
-              <a:t>Называть учебную карточку официальным актом.</a:t>
-            </a:r>
-          </a:p>
-          <a:p>
-            <a:pPr lvl="0"/>
-            <a:r>
-              <a:t>Считать перечень единственным доказательством без анализа фактов.</a:t>
+              <a:t>результаты аудита, инцидента или проверки.</a:t>
+            </a:r>
+          </a:p>
+          <a:p>
+            <a:pPr marL="0" lvl="0" indent="0">
+              <a:buNone/>
+            </a:pPr>
+            <a:r>
+              <a:t>Сроки и состав обязательных триггеров проверяются по действующей редакции нормативных источников.</a:t>
             </a:r>
           </a:p>
         </p:txBody>
@@ -3774,7 +3793,7 @@
           <p:cNvPr id="4" name="Номер слайда 3">
             <a:extLst>
               <a:ext uri="{FF2B5EF4-FFF2-40B4-BE49-F238E27FC236}">
-                <a16:creationId xmlns:a16="http://schemas.microsoft.com/office/drawing/2014/main" id="{ABFF1D18-1685-4A97-9A31-5B36F11B808B}"/>
+                <a16:creationId xmlns:a16="http://schemas.microsoft.com/office/drawing/2014/main" id="{648FC81E-0DAC-41BD-8985-F46BC2A98962}"/>
               </a:ext>
             </a:extLst>
           </p:cNvPr>
@@ -3825,6 +3844,30 @@
       </p:grpSpPr>
       <p:sp>
         <p:nvSpPr>
+          <p:cNvPr id="2" name="Title 1"/>
+          <p:cNvSpPr>
+            <a:spLocks noGrp="1"/>
+          </p:cNvSpPr>
+          <p:nvPr>
+            <p:ph type="title"/>
+          </p:nvPr>
+        </p:nvSpPr>
+        <p:spPr/>
+        <p:txBody>
+          <a:bodyPr/>
+          <a:lstStyle/>
+          <a:p>
+            <a:pPr marL="0" lvl="0" indent="0">
+              <a:buNone/>
+            </a:pPr>
+            <a:r>
+              <a:t>Частые ошибки</a:t>
+            </a:r>
+          </a:p>
+        </p:txBody>
+      </p:sp>
+      <p:sp>
+        <p:nvSpPr>
           <p:cNvPr id="3" name="Content Placeholder 2"/>
           <p:cNvSpPr>
             <a:spLocks noGrp="1"/>
@@ -3838,194 +3881,39 @@
           <a:bodyPr/>
           <a:lstStyle/>
           <a:p>
-            <a:pPr marL="0" lvl="0" indent="0">
-              <a:buNone/>
-            </a:pPr>
-            <a:r>
-              <a:rPr b="1" dirty="0" err="1"/>
-              <a:t>входные</a:t>
-            </a:r>
-            <a:r>
-              <a:rPr b="1" dirty="0"/>
-              <a:t> </a:t>
-            </a:r>
-            <a:r>
-              <a:rPr b="1" dirty="0" err="1"/>
-              <a:t>факты</a:t>
-            </a:r>
-            <a:r>
-              <a:rPr b="1" dirty="0"/>
-              <a:t> → </a:t>
-            </a:r>
-            <a:r>
-              <a:rPr b="1" dirty="0" err="1"/>
-              <a:t>сопоставление</a:t>
-            </a:r>
-            <a:r>
-              <a:rPr b="1" dirty="0"/>
-              <a:t> → </a:t>
-            </a:r>
-            <a:r>
-              <a:rPr b="1" dirty="0" err="1"/>
-              <a:t>показатели</a:t>
-            </a:r>
-            <a:r>
-              <a:rPr b="1" dirty="0"/>
-              <a:t> </a:t>
-            </a:r>
-            <a:r>
-              <a:rPr b="1" dirty="0" err="1"/>
-              <a:t>последствий</a:t>
-            </a:r>
-            <a:r>
-              <a:rPr b="1" dirty="0"/>
-              <a:t> → </a:t>
-            </a:r>
-            <a:r>
-              <a:rPr b="1" dirty="0" err="1"/>
-              <a:t>решение</a:t>
-            </a:r>
-            <a:r>
-              <a:rPr b="1" dirty="0"/>
-              <a:t> → </a:t>
-            </a:r>
-            <a:r>
-              <a:rPr b="1" dirty="0" err="1"/>
-              <a:t>доказательства</a:t>
-            </a:r>
-            <a:r>
-              <a:rPr b="1" dirty="0"/>
-              <a:t> → </a:t>
-            </a:r>
-            <a:r>
-              <a:rPr b="1" dirty="0" err="1"/>
-              <a:t>пересмотр</a:t>
-            </a:r>
-            <a:endParaRPr b="1" dirty="0"/>
-          </a:p>
-          <a:p>
-            <a:pPr marL="0" lvl="0" indent="0">
-              <a:buNone/>
-            </a:pPr>
-            <a:r>
-              <a:rPr dirty="0" err="1"/>
-              <a:t>Категорирование</a:t>
-            </a:r>
-            <a:r>
-              <a:rPr dirty="0"/>
-              <a:t> </a:t>
-            </a:r>
-            <a:r>
-              <a:rPr dirty="0" err="1"/>
-              <a:t>становится</a:t>
-            </a:r>
-            <a:r>
-              <a:rPr dirty="0"/>
-              <a:t> </a:t>
-            </a:r>
-            <a:r>
-              <a:rPr dirty="0" err="1"/>
-              <a:t>воспроизводимым</a:t>
-            </a:r>
-            <a:r>
-              <a:rPr dirty="0"/>
-              <a:t>, </a:t>
-            </a:r>
-            <a:r>
-              <a:rPr dirty="0" err="1"/>
-              <a:t>когда</a:t>
-            </a:r>
-            <a:r>
-              <a:rPr dirty="0"/>
-              <a:t> </a:t>
-            </a:r>
-            <a:r>
-              <a:rPr dirty="0" err="1"/>
-              <a:t>другой</a:t>
-            </a:r>
-            <a:r>
-              <a:rPr dirty="0"/>
-              <a:t> </a:t>
-            </a:r>
-            <a:r>
-              <a:rPr dirty="0" err="1"/>
-              <a:t>специалист</a:t>
-            </a:r>
-            <a:r>
-              <a:rPr dirty="0"/>
-              <a:t> </a:t>
-            </a:r>
-            <a:r>
-              <a:rPr dirty="0" err="1"/>
-              <a:t>может</a:t>
-            </a:r>
-            <a:r>
-              <a:rPr dirty="0"/>
-              <a:t> </a:t>
-            </a:r>
-            <a:r>
-              <a:rPr dirty="0" err="1"/>
-              <a:t>проверить</a:t>
-            </a:r>
-            <a:r>
-              <a:rPr dirty="0"/>
-              <a:t> </a:t>
-            </a:r>
-            <a:r>
-              <a:rPr dirty="0" err="1"/>
-              <a:t>исходные</a:t>
-            </a:r>
-            <a:r>
-              <a:rPr dirty="0"/>
-              <a:t> </a:t>
-            </a:r>
-            <a:r>
-              <a:rPr dirty="0" err="1"/>
-              <a:t>данные</a:t>
-            </a:r>
-            <a:r>
-              <a:rPr dirty="0"/>
-              <a:t>, </a:t>
-            </a:r>
-            <a:r>
-              <a:rPr dirty="0" err="1"/>
-              <a:t>ход</a:t>
-            </a:r>
-            <a:r>
-              <a:rPr dirty="0"/>
-              <a:t> </a:t>
-            </a:r>
-            <a:r>
-              <a:rPr dirty="0" err="1"/>
-              <a:t>рассуждения</a:t>
-            </a:r>
-            <a:r>
-              <a:rPr dirty="0"/>
-              <a:t> и </a:t>
-            </a:r>
-            <a:r>
-              <a:rPr dirty="0" err="1"/>
-              <a:t>условия</a:t>
-            </a:r>
-            <a:r>
-              <a:rPr dirty="0"/>
-              <a:t> </a:t>
-            </a:r>
-            <a:r>
-              <a:rPr dirty="0" err="1"/>
-              <a:t>изменения</a:t>
-            </a:r>
-            <a:r>
-              <a:rPr dirty="0"/>
-              <a:t> </a:t>
-            </a:r>
-            <a:r>
-              <a:rPr dirty="0" err="1"/>
-              <a:t>результата</a:t>
-            </a:r>
-            <a:r>
-              <a:rPr dirty="0"/>
-              <a:t>.</a:t>
+            <a:pPr lvl="0"/>
+            <a:r>
+              <a:t>Начинать расчёт без подтверждённой применимости и границы объекта.</a:t>
+            </a:r>
+          </a:p>
+          <a:p>
+            <a:pPr lvl="0"/>
+            <a:r>
+              <a:t>Сопоставлять только название системы с названием типового объекта.</a:t>
+            </a:r>
+          </a:p>
+          <a:p>
+            <a:pPr lvl="0"/>
+            <a:r>
+              <a:t>Подменять данные о последствиях оценочным мнением.</a:t>
+            </a:r>
+          </a:p>
+          <a:p>
+            <a:pPr lvl="0"/>
+            <a:r>
+              <a:t>Присваивать категорию при неустранённом существенном пробеле.</a:t>
+            </a:r>
+          </a:p>
+          <a:p>
+            <a:pPr lvl="0"/>
+            <a:r>
+              <a:t>Называть учебную карточку официальным актом.</a:t>
+            </a:r>
+          </a:p>
+          <a:p>
+            <a:pPr lvl="0"/>
+            <a:r>
+              <a:t>Считать перечень единственным доказательством без анализа фактов.</a:t>
             </a:r>
           </a:p>
         </p:txBody>
@@ -4035,7 +3923,7 @@
           <p:cNvPr id="4" name="Номер слайда 3">
             <a:extLst>
               <a:ext uri="{FF2B5EF4-FFF2-40B4-BE49-F238E27FC236}">
-                <a16:creationId xmlns:a16="http://schemas.microsoft.com/office/drawing/2014/main" id="{2AB0B3ED-339B-4AB3-90F2-DD0712AEAC5F}"/>
+                <a16:creationId xmlns:a16="http://schemas.microsoft.com/office/drawing/2014/main" id="{ABFF1D18-1685-4A97-9A31-5B36F11B808B}"/>
               </a:ext>
             </a:extLst>
           </p:cNvPr>
@@ -4056,34 +3944,6 @@
               <a:t>11</a:t>
             </a:fld>
             <a:endParaRPr lang="en-US"/>
-          </a:p>
-        </p:txBody>
-      </p:sp>
-      <p:sp>
-        <p:nvSpPr>
-          <p:cNvPr id="6" name="Заголовок 5">
-            <a:extLst>
-              <a:ext uri="{FF2B5EF4-FFF2-40B4-BE49-F238E27FC236}">
-                <a16:creationId xmlns:a16="http://schemas.microsoft.com/office/drawing/2014/main" id="{F066BE61-04DE-44A0-9F39-A2C49AB64975}"/>
-              </a:ext>
-            </a:extLst>
-          </p:cNvPr>
-          <p:cNvSpPr>
-            <a:spLocks noGrp="1"/>
-          </p:cNvSpPr>
-          <p:nvPr>
-            <p:ph type="title"/>
-          </p:nvPr>
-        </p:nvSpPr>
-        <p:spPr/>
-        <p:txBody>
-          <a:bodyPr/>
-          <a:lstStyle/>
-          <a:p>
-            <a:r>
-              <a:rPr lang="ru-RU" dirty="0"/>
-              <a:t>Общий порядок</a:t>
-            </a:r>
           </a:p>
         </p:txBody>
       </p:sp>
@@ -4124,6 +3984,295 @@
         </p:nvSpPr>
         <p:spPr/>
         <p:txBody>
+          <a:bodyPr/>
+          <a:lstStyle/>
+          <a:p>
+            <a:pPr marL="0" lvl="0" indent="0">
+              <a:buNone/>
+            </a:pPr>
+            <a:r>
+              <a:rPr b="1" dirty="0" err="1"/>
+              <a:t>входные</a:t>
+            </a:r>
+            <a:r>
+              <a:rPr b="1" dirty="0"/>
+              <a:t> </a:t>
+            </a:r>
+            <a:r>
+              <a:rPr b="1" dirty="0" err="1"/>
+              <a:t>факты</a:t>
+            </a:r>
+            <a:r>
+              <a:rPr b="1" dirty="0"/>
+              <a:t> → </a:t>
+            </a:r>
+            <a:r>
+              <a:rPr b="1" dirty="0" err="1"/>
+              <a:t>сопоставление</a:t>
+            </a:r>
+            <a:r>
+              <a:rPr b="1" dirty="0"/>
+              <a:t> → </a:t>
+            </a:r>
+            <a:r>
+              <a:rPr b="1" dirty="0" err="1"/>
+              <a:t>показатели</a:t>
+            </a:r>
+            <a:r>
+              <a:rPr b="1" dirty="0"/>
+              <a:t> </a:t>
+            </a:r>
+            <a:r>
+              <a:rPr b="1" dirty="0" err="1"/>
+              <a:t>последствий</a:t>
+            </a:r>
+            <a:r>
+              <a:rPr b="1" dirty="0"/>
+              <a:t> → </a:t>
+            </a:r>
+            <a:r>
+              <a:rPr b="1" dirty="0" err="1"/>
+              <a:t>решение</a:t>
+            </a:r>
+            <a:r>
+              <a:rPr b="1" dirty="0"/>
+              <a:t> → </a:t>
+            </a:r>
+            <a:r>
+              <a:rPr b="1" dirty="0" err="1"/>
+              <a:t>доказательства</a:t>
+            </a:r>
+            <a:r>
+              <a:rPr b="1" dirty="0"/>
+              <a:t> → </a:t>
+            </a:r>
+            <a:r>
+              <a:rPr b="1" dirty="0" err="1"/>
+              <a:t>пересмотр</a:t>
+            </a:r>
+            <a:endParaRPr b="1" dirty="0"/>
+          </a:p>
+          <a:p>
+            <a:pPr marL="0" lvl="0" indent="0">
+              <a:buNone/>
+            </a:pPr>
+            <a:r>
+              <a:rPr dirty="0" err="1"/>
+              <a:t>Категорирование</a:t>
+            </a:r>
+            <a:r>
+              <a:rPr dirty="0"/>
+              <a:t> </a:t>
+            </a:r>
+            <a:r>
+              <a:rPr dirty="0" err="1"/>
+              <a:t>становится</a:t>
+            </a:r>
+            <a:r>
+              <a:rPr dirty="0"/>
+              <a:t> </a:t>
+            </a:r>
+            <a:r>
+              <a:rPr dirty="0" err="1"/>
+              <a:t>воспроизводимым</a:t>
+            </a:r>
+            <a:r>
+              <a:rPr dirty="0"/>
+              <a:t>, </a:t>
+            </a:r>
+            <a:r>
+              <a:rPr dirty="0" err="1"/>
+              <a:t>когда</a:t>
+            </a:r>
+            <a:r>
+              <a:rPr dirty="0"/>
+              <a:t> </a:t>
+            </a:r>
+            <a:r>
+              <a:rPr dirty="0" err="1"/>
+              <a:t>другой</a:t>
+            </a:r>
+            <a:r>
+              <a:rPr dirty="0"/>
+              <a:t> </a:t>
+            </a:r>
+            <a:r>
+              <a:rPr dirty="0" err="1"/>
+              <a:t>специалист</a:t>
+            </a:r>
+            <a:r>
+              <a:rPr dirty="0"/>
+              <a:t> </a:t>
+            </a:r>
+            <a:r>
+              <a:rPr dirty="0" err="1"/>
+              <a:t>может</a:t>
+            </a:r>
+            <a:r>
+              <a:rPr dirty="0"/>
+              <a:t> </a:t>
+            </a:r>
+            <a:r>
+              <a:rPr dirty="0" err="1"/>
+              <a:t>проверить</a:t>
+            </a:r>
+            <a:r>
+              <a:rPr dirty="0"/>
+              <a:t> </a:t>
+            </a:r>
+            <a:r>
+              <a:rPr dirty="0" err="1"/>
+              <a:t>исходные</a:t>
+            </a:r>
+            <a:r>
+              <a:rPr dirty="0"/>
+              <a:t> </a:t>
+            </a:r>
+            <a:r>
+              <a:rPr dirty="0" err="1"/>
+              <a:t>данные</a:t>
+            </a:r>
+            <a:r>
+              <a:rPr dirty="0"/>
+              <a:t>, </a:t>
+            </a:r>
+            <a:r>
+              <a:rPr dirty="0" err="1"/>
+              <a:t>ход</a:t>
+            </a:r>
+            <a:r>
+              <a:rPr dirty="0"/>
+              <a:t> </a:t>
+            </a:r>
+            <a:r>
+              <a:rPr dirty="0" err="1"/>
+              <a:t>рассуждения</a:t>
+            </a:r>
+            <a:r>
+              <a:rPr dirty="0"/>
+              <a:t> и </a:t>
+            </a:r>
+            <a:r>
+              <a:rPr dirty="0" err="1"/>
+              <a:t>условия</a:t>
+            </a:r>
+            <a:r>
+              <a:rPr dirty="0"/>
+              <a:t> </a:t>
+            </a:r>
+            <a:r>
+              <a:rPr dirty="0" err="1"/>
+              <a:t>изменения</a:t>
+            </a:r>
+            <a:r>
+              <a:rPr dirty="0"/>
+              <a:t> </a:t>
+            </a:r>
+            <a:r>
+              <a:rPr dirty="0" err="1"/>
+              <a:t>результата</a:t>
+            </a:r>
+            <a:r>
+              <a:rPr dirty="0"/>
+              <a:t>.</a:t>
+            </a:r>
+          </a:p>
+        </p:txBody>
+      </p:sp>
+      <p:sp>
+        <p:nvSpPr>
+          <p:cNvPr id="4" name="Номер слайда 3">
+            <a:extLst>
+              <a:ext uri="{FF2B5EF4-FFF2-40B4-BE49-F238E27FC236}">
+                <a16:creationId xmlns:a16="http://schemas.microsoft.com/office/drawing/2014/main" id="{2AB0B3ED-339B-4AB3-90F2-DD0712AEAC5F}"/>
+              </a:ext>
+            </a:extLst>
+          </p:cNvPr>
+          <p:cNvSpPr>
+            <a:spLocks noGrp="1"/>
+          </p:cNvSpPr>
+          <p:nvPr>
+            <p:ph type="sldNum" sz="quarter" idx="12"/>
+          </p:nvPr>
+        </p:nvSpPr>
+        <p:spPr/>
+        <p:txBody>
+          <a:bodyPr/>
+          <a:lstStyle/>
+          <a:p>
+            <a:fld id="{C5EF2332-01BF-834F-8236-50238282D533}" type="slidenum">
+              <a:rPr lang="en-US" smtClean="0"/>
+              <a:t>12</a:t>
+            </a:fld>
+            <a:endParaRPr lang="en-US"/>
+          </a:p>
+        </p:txBody>
+      </p:sp>
+      <p:sp>
+        <p:nvSpPr>
+          <p:cNvPr id="6" name="Заголовок 5">
+            <a:extLst>
+              <a:ext uri="{FF2B5EF4-FFF2-40B4-BE49-F238E27FC236}">
+                <a16:creationId xmlns:a16="http://schemas.microsoft.com/office/drawing/2014/main" id="{F066BE61-04DE-44A0-9F39-A2C49AB64975}"/>
+              </a:ext>
+            </a:extLst>
+          </p:cNvPr>
+          <p:cNvSpPr>
+            <a:spLocks noGrp="1"/>
+          </p:cNvSpPr>
+          <p:nvPr>
+            <p:ph type="title"/>
+          </p:nvPr>
+        </p:nvSpPr>
+        <p:spPr/>
+        <p:txBody>
+          <a:bodyPr/>
+          <a:lstStyle/>
+          <a:p>
+            <a:r>
+              <a:rPr lang="ru-RU" dirty="0"/>
+              <a:t>Общий порядок</a:t>
+            </a:r>
+          </a:p>
+        </p:txBody>
+      </p:sp>
+    </p:spTree>
+  </p:cSld>
+  <p:clrMapOvr>
+    <a:masterClrMapping/>
+  </p:clrMapOvr>
+</p:sld>
+</file>
+
+<file path=ppt/slides/slide13.xml><?xml version="1.0" encoding="utf-8"?>
+<p:sld xmlns:a="http://schemas.openxmlformats.org/drawingml/2006/main" xmlns:r="http://schemas.openxmlformats.org/officeDocument/2006/relationships" xmlns:p="http://schemas.openxmlformats.org/presentationml/2006/main">
+  <p:cSld>
+    <p:spTree>
+      <p:nvGrpSpPr>
+        <p:cNvPr id="1" name=""/>
+        <p:cNvGrpSpPr/>
+        <p:nvPr/>
+      </p:nvGrpSpPr>
+      <p:grpSpPr>
+        <a:xfrm>
+          <a:off x="0" y="0"/>
+          <a:ext cx="0" cy="0"/>
+          <a:chOff x="0" y="0"/>
+          <a:chExt cx="0" cy="0"/>
+        </a:xfrm>
+      </p:grpSpPr>
+      <p:sp>
+        <p:nvSpPr>
+          <p:cNvPr id="3" name="Content Placeholder 2"/>
+          <p:cNvSpPr>
+            <a:spLocks noGrp="1"/>
+          </p:cNvSpPr>
+          <p:nvPr>
+            <p:ph idx="1"/>
+          </p:nvPr>
+        </p:nvSpPr>
+        <p:spPr/>
+        <p:txBody>
           <a:bodyPr>
             <a:normAutofit fontScale="92500" lnSpcReduction="20000"/>
           </a:bodyPr>
@@ -4307,7 +4456,7 @@
           <a:p>
             <a:fld id="{C5EF2332-01BF-834F-8236-50238282D533}" type="slidenum">
               <a:rPr lang="en-US" smtClean="0"/>
-              <a:t>12</a:t>
+              <a:t>13</a:t>
             </a:fld>
             <a:endParaRPr lang="en-US"/>
           </a:p>
@@ -4900,6 +5049,406 @@
       </p:grpSpPr>
       <p:sp>
         <p:nvSpPr>
+          <p:cNvPr id="3" name="Content Placeholder 2"/>
+          <p:cNvSpPr>
+            <a:spLocks noGrp="1"/>
+          </p:cNvSpPr>
+          <p:nvPr>
+            <p:ph idx="1"/>
+          </p:nvPr>
+        </p:nvSpPr>
+        <p:spPr>
+          <a:xfrm>
+            <a:off x="457200" y="399209"/>
+            <a:ext cx="8229600" cy="1076791"/>
+          </a:xfrm>
+        </p:spPr>
+        <p:txBody>
+          <a:bodyPr>
+            <a:normAutofit lnSpcReduction="10000"/>
+          </a:bodyPr>
+          <a:lstStyle/>
+          <a:p>
+            <a:pPr marL="0" lvl="0" indent="0">
+              <a:buNone/>
+            </a:pPr>
+            <a:r>
+              <a:rPr lang="ru-RU" sz="1600" dirty="0"/>
+              <a:t>Категорирование объектов КИИ это установленная законом процедура определения значимости информационной системы, сети или автоматизированной системы управления (АСУ) на основе оценки возможных негативных последствий при нарушении их работы</a:t>
+            </a:r>
+            <a:r>
+              <a:rPr lang="en-US" sz="1600" dirty="0"/>
+              <a:t> </a:t>
+            </a:r>
+          </a:p>
+          <a:p>
+            <a:pPr marL="0" lvl="0" indent="0">
+              <a:buNone/>
+            </a:pPr>
+            <a:r>
+              <a:rPr lang="en-US" sz="1600" dirty="0"/>
+              <a:t>(</a:t>
+            </a:r>
+            <a:r>
+              <a:rPr lang="ru-RU" sz="1600" dirty="0"/>
+              <a:t>ФЗ</a:t>
+            </a:r>
+            <a:r>
+              <a:rPr lang="en-US" sz="1600" dirty="0"/>
+              <a:t>-187</a:t>
+            </a:r>
+            <a:r>
+              <a:rPr lang="ru-RU" sz="1600" dirty="0"/>
+              <a:t>, ст.7</a:t>
+            </a:r>
+            <a:r>
+              <a:rPr lang="en-US" sz="1600" dirty="0"/>
+              <a:t>)</a:t>
+            </a:r>
+            <a:endParaRPr sz="1600" dirty="0"/>
+          </a:p>
+        </p:txBody>
+      </p:sp>
+      <p:sp>
+        <p:nvSpPr>
+          <p:cNvPr id="4" name="Номер слайда 3">
+            <a:extLst>
+              <a:ext uri="{FF2B5EF4-FFF2-40B4-BE49-F238E27FC236}">
+                <a16:creationId xmlns:a16="http://schemas.microsoft.com/office/drawing/2014/main" id="{3754475E-B5C2-45CA-909C-CA8736E40583}"/>
+              </a:ext>
+            </a:extLst>
+          </p:cNvPr>
+          <p:cNvSpPr>
+            <a:spLocks noGrp="1"/>
+          </p:cNvSpPr>
+          <p:nvPr>
+            <p:ph type="sldNum" sz="quarter" idx="12"/>
+          </p:nvPr>
+        </p:nvSpPr>
+        <p:spPr/>
+        <p:txBody>
+          <a:bodyPr/>
+          <a:lstStyle/>
+          <a:p>
+            <a:fld id="{C5EF2332-01BF-834F-8236-50238282D533}" type="slidenum">
+              <a:rPr lang="en-US" smtClean="0"/>
+              <a:t>3</a:t>
+            </a:fld>
+            <a:endParaRPr lang="en-US"/>
+          </a:p>
+        </p:txBody>
+      </p:sp>
+      <p:sp>
+        <p:nvSpPr>
+          <p:cNvPr id="5" name="Content Placeholder 2">
+            <a:extLst>
+              <a:ext uri="{FF2B5EF4-FFF2-40B4-BE49-F238E27FC236}">
+                <a16:creationId xmlns:a16="http://schemas.microsoft.com/office/drawing/2014/main" id="{BD8BC75C-D5DD-4EE1-998A-BF183922C173}"/>
+              </a:ext>
+            </a:extLst>
+          </p:cNvPr>
+          <p:cNvSpPr txBox="1">
+            <a:spLocks/>
+          </p:cNvSpPr>
+          <p:nvPr/>
+        </p:nvSpPr>
+        <p:spPr>
+          <a:xfrm>
+            <a:off x="457200" y="1670400"/>
+            <a:ext cx="8229600" cy="3267121"/>
+          </a:xfrm>
+          <a:prstGeom prst="rect">
+            <a:avLst/>
+          </a:prstGeom>
+        </p:spPr>
+        <p:txBody>
+          <a:bodyPr vert="horz" lIns="91440" tIns="45720" rIns="91440" bIns="45720" rtlCol="0">
+            <a:normAutofit fontScale="92500" lnSpcReduction="20000"/>
+          </a:bodyPr>
+          <a:lstStyle>
+            <a:lvl1pPr marL="342900" indent="-342900" algn="l" defTabSz="342900" rtl="0" eaLnBrk="1" latinLnBrk="0" hangingPunct="1">
+              <a:spcBef>
+                <a:spcPct val="20000"/>
+              </a:spcBef>
+              <a:buFont typeface="Arial"/>
+              <a:buChar char="•"/>
+              <a:defRPr sz="2000" kern="1200">
+                <a:solidFill>
+                  <a:schemeClr val="tx1"/>
+                </a:solidFill>
+                <a:latin typeface="+mn-lt"/>
+                <a:ea typeface="+mn-ea"/>
+                <a:cs typeface="+mn-cs"/>
+              </a:defRPr>
+            </a:lvl1pPr>
+            <a:lvl2pPr marL="685800" indent="-342900" algn="l" defTabSz="342900" rtl="0" eaLnBrk="1" latinLnBrk="0" hangingPunct="1">
+              <a:spcBef>
+                <a:spcPct val="20000"/>
+              </a:spcBef>
+              <a:buFont typeface="Arial"/>
+              <a:buChar char="–"/>
+              <a:defRPr sz="2000" kern="1200">
+                <a:solidFill>
+                  <a:schemeClr val="tx1"/>
+                </a:solidFill>
+                <a:latin typeface="+mn-lt"/>
+                <a:ea typeface="+mn-ea"/>
+                <a:cs typeface="+mn-cs"/>
+              </a:defRPr>
+            </a:lvl2pPr>
+            <a:lvl3pPr marL="1028700" indent="-342900" algn="l" defTabSz="342900" rtl="0" eaLnBrk="1" latinLnBrk="0" hangingPunct="1">
+              <a:spcBef>
+                <a:spcPct val="20000"/>
+              </a:spcBef>
+              <a:buFont typeface="Arial"/>
+              <a:buChar char="•"/>
+              <a:defRPr sz="1600" kern="1200">
+                <a:solidFill>
+                  <a:schemeClr val="tx1"/>
+                </a:solidFill>
+                <a:latin typeface="+mn-lt"/>
+                <a:ea typeface="+mn-ea"/>
+                <a:cs typeface="+mn-cs"/>
+              </a:defRPr>
+            </a:lvl3pPr>
+            <a:lvl4pPr marL="1371600" indent="-342900" algn="l" defTabSz="342900" rtl="0" eaLnBrk="1" latinLnBrk="0" hangingPunct="1">
+              <a:spcBef>
+                <a:spcPct val="20000"/>
+              </a:spcBef>
+              <a:buFont typeface="Arial"/>
+              <a:buChar char="–"/>
+              <a:defRPr sz="1400" kern="1200">
+                <a:solidFill>
+                  <a:schemeClr val="tx1"/>
+                </a:solidFill>
+                <a:latin typeface="+mn-lt"/>
+                <a:ea typeface="+mn-ea"/>
+                <a:cs typeface="+mn-cs"/>
+              </a:defRPr>
+            </a:lvl4pPr>
+            <a:lvl5pPr marL="1714500" indent="-342900" algn="l" defTabSz="342900" rtl="0" eaLnBrk="1" latinLnBrk="0" hangingPunct="1">
+              <a:spcBef>
+                <a:spcPct val="20000"/>
+              </a:spcBef>
+              <a:buFont typeface="Arial"/>
+              <a:buChar char="»"/>
+              <a:defRPr sz="1400" kern="1200">
+                <a:solidFill>
+                  <a:schemeClr val="tx1"/>
+                </a:solidFill>
+                <a:latin typeface="+mn-lt"/>
+                <a:ea typeface="+mn-ea"/>
+                <a:cs typeface="+mn-cs"/>
+              </a:defRPr>
+            </a:lvl5pPr>
+            <a:lvl6pPr marL="2057400" indent="-342900" algn="l" defTabSz="342900" rtl="0" eaLnBrk="1" latinLnBrk="0" hangingPunct="1">
+              <a:spcBef>
+                <a:spcPct val="20000"/>
+              </a:spcBef>
+              <a:buFont typeface="Arial"/>
+              <a:buChar char="•"/>
+              <a:defRPr sz="1500" kern="1200">
+                <a:solidFill>
+                  <a:schemeClr val="tx1"/>
+                </a:solidFill>
+                <a:latin typeface="+mn-lt"/>
+                <a:ea typeface="+mn-ea"/>
+                <a:cs typeface="+mn-cs"/>
+              </a:defRPr>
+            </a:lvl6pPr>
+            <a:lvl7pPr marL="2400300" indent="-342900" algn="l" defTabSz="342900" rtl="0" eaLnBrk="1" latinLnBrk="0" hangingPunct="1">
+              <a:spcBef>
+                <a:spcPct val="20000"/>
+              </a:spcBef>
+              <a:buFont typeface="Arial"/>
+              <a:buChar char="•"/>
+              <a:defRPr sz="1500" kern="1200">
+                <a:solidFill>
+                  <a:schemeClr val="tx1"/>
+                </a:solidFill>
+                <a:latin typeface="+mn-lt"/>
+                <a:ea typeface="+mn-ea"/>
+                <a:cs typeface="+mn-cs"/>
+              </a:defRPr>
+            </a:lvl7pPr>
+            <a:lvl8pPr marL="2743200" indent="-342900" algn="l" defTabSz="342900" rtl="0" eaLnBrk="1" latinLnBrk="0" hangingPunct="1">
+              <a:spcBef>
+                <a:spcPct val="20000"/>
+              </a:spcBef>
+              <a:buFont typeface="Arial"/>
+              <a:buChar char="•"/>
+              <a:defRPr sz="1500" kern="1200">
+                <a:solidFill>
+                  <a:schemeClr val="tx1"/>
+                </a:solidFill>
+                <a:latin typeface="+mn-lt"/>
+                <a:ea typeface="+mn-ea"/>
+                <a:cs typeface="+mn-cs"/>
+              </a:defRPr>
+            </a:lvl8pPr>
+            <a:lvl9pPr marL="3086100" indent="-342900" algn="l" defTabSz="342900" rtl="0" eaLnBrk="1" latinLnBrk="0" hangingPunct="1">
+              <a:spcBef>
+                <a:spcPct val="20000"/>
+              </a:spcBef>
+              <a:buFont typeface="Arial"/>
+              <a:buChar char="•"/>
+              <a:defRPr sz="1500" kern="1200">
+                <a:solidFill>
+                  <a:schemeClr val="tx1"/>
+                </a:solidFill>
+                <a:latin typeface="+mn-lt"/>
+                <a:ea typeface="+mn-ea"/>
+                <a:cs typeface="+mn-cs"/>
+              </a:defRPr>
+            </a:lvl9pPr>
+          </a:lstStyle>
+          <a:p>
+            <a:pPr marL="457200" indent="-457200">
+              <a:buFont typeface="Arial"/>
+              <a:buAutoNum type="arabicPeriod"/>
+            </a:pPr>
+            <a:r>
+              <a:rPr lang="ru-RU" sz="1600" dirty="0"/>
+              <a:t>Создание комиссии</a:t>
+            </a:r>
+            <a:r>
+              <a:rPr lang="en-US" sz="1600" dirty="0"/>
+              <a:t> </a:t>
+            </a:r>
+            <a:r>
+              <a:rPr lang="ru-RU" sz="1600" dirty="0"/>
+              <a:t>Руководитель организации своим приказом формирует постоянно действующую комиссию по категорированию.</a:t>
+            </a:r>
+            <a:endParaRPr lang="en-US" sz="1600" dirty="0"/>
+          </a:p>
+          <a:p>
+            <a:pPr marL="457200" indent="-457200">
+              <a:buFont typeface="Arial"/>
+              <a:buAutoNum type="arabicPeriod"/>
+            </a:pPr>
+            <a:r>
+              <a:rPr lang="ru-RU" sz="1600" dirty="0"/>
+              <a:t>Инвентаризация и выявление объектов</a:t>
+            </a:r>
+            <a:r>
+              <a:rPr lang="en-US" sz="1600" dirty="0"/>
+              <a:t> </a:t>
+            </a:r>
+            <a:r>
+              <a:rPr lang="ru-RU" sz="1600" dirty="0"/>
+              <a:t>Проводится аудит и составляется перечень всех информационных систем (ИС), информационно-телекоммуникационных сетей (ИТКС) и АСУ ТП, используемых в ключевых сферах деятельности.</a:t>
+            </a:r>
+            <a:endParaRPr lang="en-US" sz="1600" dirty="0"/>
+          </a:p>
+          <a:p>
+            <a:pPr marL="457200" indent="-457200">
+              <a:buFont typeface="Arial"/>
+              <a:buAutoNum type="arabicPeriod"/>
+            </a:pPr>
+            <a:r>
+              <a:rPr lang="ru-RU" sz="1600" dirty="0"/>
+              <a:t>Определение процессов и угроз</a:t>
+            </a:r>
+            <a:r>
+              <a:rPr lang="en-US" sz="1600" dirty="0"/>
+              <a:t> </a:t>
+            </a:r>
+            <a:r>
+              <a:rPr lang="ru-RU" sz="1600" dirty="0"/>
+              <a:t>Анализируются технологические и бизнес-процессы, выявляются возможные нарушители и актуальные угрозы безопасности.</a:t>
+            </a:r>
+            <a:endParaRPr lang="en-US" sz="1600" dirty="0"/>
+          </a:p>
+          <a:p>
+            <a:pPr marL="457200" indent="-457200">
+              <a:buFont typeface="Arial"/>
+              <a:buAutoNum type="arabicPeriod"/>
+            </a:pPr>
+            <a:r>
+              <a:rPr lang="ru-RU" sz="1600" dirty="0"/>
+              <a:t>Оценка масштаба возможных последствий</a:t>
+            </a:r>
+            <a:r>
+              <a:rPr lang="en-US" sz="1600" dirty="0"/>
+              <a:t> </a:t>
+            </a:r>
+            <a:r>
+              <a:rPr lang="ru-RU" sz="1600" dirty="0"/>
+              <a:t>Ущерб оценивается по социальным, политическим, экономическим, экологическим показателям и факторам безопасности государства (согласно критериям ПП № 127).</a:t>
+            </a:r>
+            <a:endParaRPr lang="en-US" sz="1600" dirty="0"/>
+          </a:p>
+          <a:p>
+            <a:pPr marL="457200" indent="-457200">
+              <a:buFont typeface="Arial"/>
+              <a:buAutoNum type="arabicPeriod"/>
+            </a:pPr>
+            <a:r>
+              <a:rPr lang="ru-RU" sz="1600" dirty="0"/>
+              <a:t>Присвоение категории</a:t>
+            </a:r>
+            <a:r>
+              <a:rPr lang="en-US" sz="1600" dirty="0"/>
+              <a:t> </a:t>
+            </a:r>
+            <a:r>
+              <a:rPr lang="ru-RU" sz="1600" dirty="0"/>
+              <a:t>Объекту присваивается одна из трех категорий значимости (I, II или III) либо принимается решение о том, что объект является незначимым.</a:t>
+            </a:r>
+            <a:endParaRPr lang="en-US" sz="1600" dirty="0"/>
+          </a:p>
+          <a:p>
+            <a:pPr marL="457200" indent="-457200">
+              <a:buFont typeface="Arial"/>
+              <a:buAutoNum type="arabicPeriod"/>
+            </a:pPr>
+            <a:r>
+              <a:rPr lang="ru-RU" sz="1600" dirty="0"/>
+              <a:t>Согласование и отправка во ФСТЭК</a:t>
+            </a:r>
+            <a:r>
+              <a:rPr lang="en-US" sz="1600" dirty="0"/>
+              <a:t> </a:t>
+            </a:r>
+            <a:r>
+              <a:rPr lang="ru-RU" sz="1600" dirty="0"/>
+              <a:t>Результаты оформляются актом и сведениями по установленной форме (Форма 236), которые направляются во ФСТЭК России в течение 10 рабочих дней</a:t>
+            </a:r>
+          </a:p>
+        </p:txBody>
+      </p:sp>
+    </p:spTree>
+    <p:extLst>
+      <p:ext uri="{BB962C8B-B14F-4D97-AF65-F5344CB8AC3E}">
+        <p14:creationId xmlns:p14="http://schemas.microsoft.com/office/powerpoint/2010/main" val="1290634"/>
+      </p:ext>
+    </p:extLst>
+  </p:cSld>
+  <p:clrMapOvr>
+    <a:masterClrMapping/>
+  </p:clrMapOvr>
+</p:sld>
+</file>
+
+<file path=ppt/slides/slide4.xml><?xml version="1.0" encoding="utf-8"?>
+<p:sld xmlns:a="http://schemas.openxmlformats.org/drawingml/2006/main" xmlns:r="http://schemas.openxmlformats.org/officeDocument/2006/relationships" xmlns:p="http://schemas.openxmlformats.org/presentationml/2006/main">
+  <p:cSld>
+    <p:spTree>
+      <p:nvGrpSpPr>
+        <p:cNvPr id="1" name=""/>
+        <p:cNvGrpSpPr/>
+        <p:nvPr/>
+      </p:nvGrpSpPr>
+      <p:grpSpPr>
+        <a:xfrm>
+          <a:off x="0" y="0"/>
+          <a:ext cx="0" cy="0"/>
+          <a:chOff x="0" y="0"/>
+          <a:chExt cx="0" cy="0"/>
+        </a:xfrm>
+      </p:grpSpPr>
+      <p:sp>
+        <p:nvSpPr>
           <p:cNvPr id="2" name="Title 1"/>
           <p:cNvSpPr>
             <a:spLocks noGrp="1"/>
@@ -5236,387 +5785,6 @@
           <a:p>
             <a:fld id="{C5EF2332-01BF-834F-8236-50238282D533}" type="slidenum">
               <a:rPr lang="en-US" smtClean="0"/>
-              <a:t>3</a:t>
-            </a:fld>
-            <a:endParaRPr lang="en-US"/>
-          </a:p>
-        </p:txBody>
-      </p:sp>
-    </p:spTree>
-  </p:cSld>
-  <p:clrMapOvr>
-    <a:masterClrMapping/>
-  </p:clrMapOvr>
-</p:sld>
-</file>
-
-<file path=ppt/slides/slide4.xml><?xml version="1.0" encoding="utf-8"?>
-<p:sld xmlns:a="http://schemas.openxmlformats.org/drawingml/2006/main" xmlns:r="http://schemas.openxmlformats.org/officeDocument/2006/relationships" xmlns:p="http://schemas.openxmlformats.org/presentationml/2006/main">
-  <p:cSld>
-    <p:spTree>
-      <p:nvGrpSpPr>
-        <p:cNvPr id="1" name=""/>
-        <p:cNvGrpSpPr/>
-        <p:nvPr/>
-      </p:nvGrpSpPr>
-      <p:grpSpPr>
-        <a:xfrm>
-          <a:off x="0" y="0"/>
-          <a:ext cx="0" cy="0"/>
-          <a:chOff x="0" y="0"/>
-          <a:chExt cx="0" cy="0"/>
-        </a:xfrm>
-      </p:grpSpPr>
-      <p:sp>
-        <p:nvSpPr>
-          <p:cNvPr id="2" name="Title 1"/>
-          <p:cNvSpPr>
-            <a:spLocks noGrp="1"/>
-          </p:cNvSpPr>
-          <p:nvPr>
-            <p:ph type="title"/>
-          </p:nvPr>
-        </p:nvSpPr>
-        <p:spPr/>
-        <p:txBody>
-          <a:bodyPr/>
-          <a:lstStyle/>
-          <a:p>
-            <a:pPr marL="0" lvl="0" indent="0">
-              <a:buNone/>
-            </a:pPr>
-            <a:r>
-              <a:t>Шаг 1. Проверка входа</a:t>
-            </a:r>
-          </a:p>
-        </p:txBody>
-      </p:sp>
-      <p:sp>
-        <p:nvSpPr>
-          <p:cNvPr id="3" name="Content Placeholder 2"/>
-          <p:cNvSpPr>
-            <a:spLocks noGrp="1"/>
-          </p:cNvSpPr>
-          <p:nvPr>
-            <p:ph idx="1"/>
-          </p:nvPr>
-        </p:nvSpPr>
-        <p:spPr/>
-        <p:txBody>
-          <a:bodyPr/>
-          <a:lstStyle/>
-          <a:p>
-            <a:pPr marL="0" lvl="0" indent="0">
-              <a:buNone/>
-            </a:pPr>
-            <a:r>
-              <a:rPr dirty="0" err="1"/>
-              <a:t>Используйте</a:t>
-            </a:r>
-            <a:r>
-              <a:rPr dirty="0"/>
-              <a:t> </a:t>
-            </a:r>
-            <a:r>
-              <a:rPr dirty="0" err="1"/>
-              <a:t>паспорт</a:t>
-            </a:r>
-            <a:r>
-              <a:rPr dirty="0"/>
-              <a:t> </a:t>
-            </a:r>
-            <a:r>
-              <a:rPr dirty="0" err="1"/>
-              <a:t>применимости</a:t>
-            </a:r>
-            <a:r>
-              <a:rPr dirty="0"/>
-              <a:t>:</a:t>
-            </a:r>
-          </a:p>
-          <a:p>
-            <a:pPr marL="342900" lvl="0" indent="-342900">
-              <a:buAutoNum type="arabicPeriod"/>
-            </a:pPr>
-            <a:r>
-              <a:rPr dirty="0" err="1"/>
-              <a:t>субъект</a:t>
-            </a:r>
-            <a:r>
-              <a:rPr dirty="0"/>
-              <a:t> и </a:t>
-            </a:r>
-            <a:r>
-              <a:rPr dirty="0" err="1"/>
-              <a:t>основание</a:t>
-            </a:r>
-            <a:r>
-              <a:rPr dirty="0"/>
-              <a:t> </a:t>
-            </a:r>
-            <a:r>
-              <a:rPr dirty="0" err="1"/>
-              <a:t>применимости</a:t>
-            </a:r>
-            <a:r>
-              <a:rPr dirty="0"/>
-              <a:t> </a:t>
-            </a:r>
-            <a:r>
-              <a:rPr dirty="0" err="1"/>
-              <a:t>подтверждены</a:t>
-            </a:r>
-            <a:r>
-              <a:rPr dirty="0"/>
-              <a:t>;</a:t>
-            </a:r>
-          </a:p>
-          <a:p>
-            <a:pPr marL="342900" lvl="0" indent="-342900">
-              <a:buAutoNum type="arabicPeriod"/>
-            </a:pPr>
-            <a:r>
-              <a:rPr dirty="0" err="1"/>
-              <a:t>объект</a:t>
-            </a:r>
-            <a:r>
-              <a:rPr dirty="0"/>
-              <a:t> </a:t>
-            </a:r>
-            <a:r>
-              <a:rPr dirty="0" err="1"/>
-              <a:t>описан</a:t>
-            </a:r>
-            <a:r>
-              <a:rPr dirty="0"/>
-              <a:t> </a:t>
-            </a:r>
-            <a:r>
-              <a:rPr dirty="0" err="1"/>
-              <a:t>как</a:t>
-            </a:r>
-            <a:r>
-              <a:rPr dirty="0"/>
-              <a:t> ИС, </a:t>
-            </a:r>
-            <a:r>
-              <a:rPr dirty="0" err="1"/>
-              <a:t>сеть</a:t>
-            </a:r>
-            <a:r>
-              <a:rPr dirty="0"/>
-              <a:t> </a:t>
-            </a:r>
-            <a:r>
-              <a:rPr dirty="0" err="1"/>
-              <a:t>или</a:t>
-            </a:r>
-            <a:r>
-              <a:rPr dirty="0"/>
-              <a:t> АСУ;</a:t>
-            </a:r>
-          </a:p>
-          <a:p>
-            <a:pPr marL="342900" lvl="0" indent="-342900">
-              <a:buAutoNum type="arabicPeriod"/>
-            </a:pPr>
-            <a:r>
-              <a:rPr dirty="0" err="1"/>
-              <a:t>установлены</a:t>
-            </a:r>
-            <a:r>
-              <a:rPr dirty="0"/>
-              <a:t> </a:t>
-            </a:r>
-            <a:r>
-              <a:rPr dirty="0" err="1"/>
-              <a:t>владелец</a:t>
-            </a:r>
-            <a:r>
-              <a:rPr dirty="0"/>
-              <a:t>, </a:t>
-            </a:r>
-            <a:r>
-              <a:rPr dirty="0" err="1"/>
-              <a:t>граница</a:t>
-            </a:r>
-            <a:r>
-              <a:rPr dirty="0"/>
-              <a:t> и </a:t>
-            </a:r>
-            <a:r>
-              <a:rPr dirty="0" err="1"/>
-              <a:t>функция</a:t>
-            </a:r>
-            <a:r>
-              <a:rPr dirty="0"/>
-              <a:t>;</a:t>
-            </a:r>
-          </a:p>
-          <a:p>
-            <a:pPr marL="342900" lvl="0" indent="-342900">
-              <a:buAutoNum type="arabicPeriod"/>
-            </a:pPr>
-            <a:r>
-              <a:rPr dirty="0" err="1"/>
-              <a:t>источники</a:t>
-            </a:r>
-            <a:r>
-              <a:rPr dirty="0"/>
-              <a:t> </a:t>
-            </a:r>
-            <a:r>
-              <a:rPr dirty="0" err="1"/>
-              <a:t>фактов</a:t>
-            </a:r>
-            <a:r>
-              <a:rPr dirty="0"/>
-              <a:t> </a:t>
-            </a:r>
-            <a:r>
-              <a:rPr dirty="0" err="1"/>
-              <a:t>известны</a:t>
-            </a:r>
-            <a:r>
-              <a:rPr dirty="0"/>
-              <a:t>;</a:t>
-            </a:r>
-          </a:p>
-          <a:p>
-            <a:pPr marL="342900" lvl="0" indent="-342900">
-              <a:buAutoNum type="arabicPeriod"/>
-            </a:pPr>
-            <a:r>
-              <a:rPr dirty="0" err="1"/>
-              <a:t>неустранённые</a:t>
-            </a:r>
-            <a:r>
-              <a:rPr dirty="0"/>
-              <a:t> </a:t>
-            </a:r>
-            <a:r>
-              <a:rPr dirty="0" err="1"/>
-              <a:t>пробелы</a:t>
-            </a:r>
-            <a:r>
-              <a:rPr dirty="0"/>
-              <a:t> </a:t>
-            </a:r>
-            <a:r>
-              <a:rPr dirty="0" err="1"/>
-              <a:t>не</a:t>
-            </a:r>
-            <a:r>
-              <a:rPr dirty="0"/>
-              <a:t> </a:t>
-            </a:r>
-            <a:r>
-              <a:rPr dirty="0" err="1"/>
-              <a:t>искажают</a:t>
-            </a:r>
-            <a:r>
-              <a:rPr dirty="0"/>
-              <a:t> </a:t>
-            </a:r>
-            <a:r>
-              <a:rPr dirty="0" err="1"/>
-              <a:t>расчёт</a:t>
-            </a:r>
-            <a:r>
-              <a:rPr dirty="0"/>
-              <a:t>.</a:t>
-            </a:r>
-          </a:p>
-          <a:p>
-            <a:pPr marL="0" lvl="0" indent="0">
-              <a:buNone/>
-            </a:pPr>
-            <a:r>
-              <a:rPr dirty="0" err="1"/>
-              <a:t>Если</a:t>
-            </a:r>
-            <a:r>
-              <a:rPr dirty="0"/>
-              <a:t> </a:t>
-            </a:r>
-            <a:r>
-              <a:rPr dirty="0" err="1"/>
-              <a:t>условие</a:t>
-            </a:r>
-            <a:r>
-              <a:rPr dirty="0"/>
-              <a:t> </a:t>
-            </a:r>
-            <a:r>
-              <a:rPr dirty="0" err="1"/>
-              <a:t>не</a:t>
-            </a:r>
-            <a:r>
-              <a:rPr dirty="0"/>
-              <a:t> </a:t>
-            </a:r>
-            <a:r>
-              <a:rPr dirty="0" err="1"/>
-              <a:t>выполнено</a:t>
-            </a:r>
-            <a:r>
-              <a:rPr dirty="0"/>
-              <a:t>, </a:t>
-            </a:r>
-            <a:r>
-              <a:rPr dirty="0" err="1"/>
-              <a:t>результат</a:t>
-            </a:r>
-            <a:r>
-              <a:rPr lang="ru-RU" dirty="0"/>
-              <a:t>:</a:t>
-            </a:r>
-            <a:r>
-              <a:rPr dirty="0"/>
-              <a:t>  </a:t>
-            </a:r>
-            <a:r>
-              <a:rPr dirty="0" err="1"/>
-              <a:t>запрос</a:t>
-            </a:r>
-            <a:r>
-              <a:rPr dirty="0"/>
-              <a:t> </a:t>
-            </a:r>
-            <a:r>
-              <a:rPr dirty="0" err="1"/>
-              <a:t>уточнений</a:t>
-            </a:r>
-            <a:r>
-              <a:rPr dirty="0"/>
-              <a:t>.</a:t>
-            </a:r>
-          </a:p>
-        </p:txBody>
-      </p:sp>
-      <p:sp>
-        <p:nvSpPr>
-          <p:cNvPr id="4" name="Номер слайда 3">
-            <a:extLst>
-              <a:ext uri="{FF2B5EF4-FFF2-40B4-BE49-F238E27FC236}">
-                <a16:creationId xmlns:a16="http://schemas.microsoft.com/office/drawing/2014/main" id="{3754475E-B5C2-45CA-909C-CA8736E40583}"/>
-              </a:ext>
-            </a:extLst>
-          </p:cNvPr>
-          <p:cNvSpPr>
-            <a:spLocks noGrp="1"/>
-          </p:cNvSpPr>
-          <p:nvPr>
-            <p:ph type="sldNum" sz="quarter" idx="12"/>
-          </p:nvPr>
-        </p:nvSpPr>
-        <p:spPr/>
-        <p:txBody>
-          <a:bodyPr/>
-          <a:lstStyle/>
-          <a:p>
-            <a:fld id="{C5EF2332-01BF-834F-8236-50238282D533}" type="slidenum">
-              <a:rPr lang="en-US" smtClean="0"/>
               <a:t>4</a:t>
             </a:fld>
             <a:endParaRPr lang="en-US"/>
@@ -5667,7 +5835,7 @@
               <a:buNone/>
             </a:pPr>
             <a:r>
-              <a:t>Шаг 2. Сопоставление с перечнем</a:t>
+              <a:t>Шаг 1. Проверка входа</a:t>
             </a:r>
           </a:p>
         </p:txBody>
@@ -5691,37 +5859,221 @@
               <a:buNone/>
             </a:pPr>
             <a:r>
-              <a:t>Сопоставляйте объект не по одному названию, а по совокупности признаков:</a:t>
-            </a:r>
-          </a:p>
-          <a:p>
-            <a:pPr lvl="0"/>
-            <a:r>
-              <a:t>виду объекта;</a:t>
-            </a:r>
-          </a:p>
-          <a:p>
-            <a:pPr lvl="0"/>
-            <a:r>
-              <a:t>функции или процессу;</a:t>
-            </a:r>
-          </a:p>
-          <a:p>
-            <a:pPr lvl="0"/>
-            <a:r>
-              <a:t>сфере деятельности;</a:t>
-            </a:r>
-          </a:p>
-          <a:p>
-            <a:pPr lvl="0"/>
-            <a:r>
-              <a:t>признакам, указанным в действующей версии типового перечня;</a:t>
-            </a:r>
-          </a:p>
-          <a:p>
-            <a:pPr lvl="0"/>
-            <a:r>
-              <a:t>отраслевым особенностям, если они применимы.</a:t>
+              <a:rPr dirty="0" err="1"/>
+              <a:t>Используйте</a:t>
+            </a:r>
+            <a:r>
+              <a:rPr dirty="0"/>
+              <a:t> </a:t>
+            </a:r>
+            <a:r>
+              <a:rPr dirty="0" err="1"/>
+              <a:t>паспорт</a:t>
+            </a:r>
+            <a:r>
+              <a:rPr dirty="0"/>
+              <a:t> </a:t>
+            </a:r>
+            <a:r>
+              <a:rPr dirty="0" err="1"/>
+              <a:t>применимости</a:t>
+            </a:r>
+            <a:r>
+              <a:rPr dirty="0"/>
+              <a:t>:</a:t>
+            </a:r>
+          </a:p>
+          <a:p>
+            <a:pPr marL="342900" lvl="0" indent="-342900">
+              <a:buAutoNum type="arabicPeriod"/>
+            </a:pPr>
+            <a:r>
+              <a:rPr dirty="0" err="1"/>
+              <a:t>субъект</a:t>
+            </a:r>
+            <a:r>
+              <a:rPr dirty="0"/>
+              <a:t> и </a:t>
+            </a:r>
+            <a:r>
+              <a:rPr dirty="0" err="1"/>
+              <a:t>основание</a:t>
+            </a:r>
+            <a:r>
+              <a:rPr dirty="0"/>
+              <a:t> </a:t>
+            </a:r>
+            <a:r>
+              <a:rPr dirty="0" err="1"/>
+              <a:t>применимости</a:t>
+            </a:r>
+            <a:r>
+              <a:rPr dirty="0"/>
+              <a:t> </a:t>
+            </a:r>
+            <a:r>
+              <a:rPr dirty="0" err="1"/>
+              <a:t>подтверждены</a:t>
+            </a:r>
+            <a:r>
+              <a:rPr dirty="0"/>
+              <a:t>;</a:t>
+            </a:r>
+          </a:p>
+          <a:p>
+            <a:pPr marL="342900" lvl="0" indent="-342900">
+              <a:buAutoNum type="arabicPeriod"/>
+            </a:pPr>
+            <a:r>
+              <a:rPr dirty="0" err="1"/>
+              <a:t>объект</a:t>
+            </a:r>
+            <a:r>
+              <a:rPr dirty="0"/>
+              <a:t> </a:t>
+            </a:r>
+            <a:r>
+              <a:rPr dirty="0" err="1"/>
+              <a:t>описан</a:t>
+            </a:r>
+            <a:r>
+              <a:rPr dirty="0"/>
+              <a:t> </a:t>
+            </a:r>
+            <a:r>
+              <a:rPr dirty="0" err="1"/>
+              <a:t>как</a:t>
+            </a:r>
+            <a:r>
+              <a:rPr dirty="0"/>
+              <a:t> ИС, </a:t>
+            </a:r>
+            <a:r>
+              <a:rPr dirty="0" err="1"/>
+              <a:t>сеть</a:t>
+            </a:r>
+            <a:r>
+              <a:rPr dirty="0"/>
+              <a:t> </a:t>
+            </a:r>
+            <a:r>
+              <a:rPr dirty="0" err="1"/>
+              <a:t>или</a:t>
+            </a:r>
+            <a:r>
+              <a:rPr dirty="0"/>
+              <a:t> АСУ;</a:t>
+            </a:r>
+          </a:p>
+          <a:p>
+            <a:pPr marL="342900" lvl="0" indent="-342900">
+              <a:buAutoNum type="arabicPeriod"/>
+            </a:pPr>
+            <a:r>
+              <a:rPr dirty="0" err="1"/>
+              <a:t>установлены</a:t>
+            </a:r>
+            <a:r>
+              <a:rPr dirty="0"/>
+              <a:t> </a:t>
+            </a:r>
+            <a:r>
+              <a:rPr dirty="0" err="1"/>
+              <a:t>владелец</a:t>
+            </a:r>
+            <a:r>
+              <a:rPr dirty="0"/>
+              <a:t>, </a:t>
+            </a:r>
+            <a:r>
+              <a:rPr dirty="0" err="1"/>
+              <a:t>граница</a:t>
+            </a:r>
+            <a:r>
+              <a:rPr dirty="0"/>
+              <a:t> и </a:t>
+            </a:r>
+            <a:r>
+              <a:rPr dirty="0" err="1"/>
+              <a:t>функция</a:t>
+            </a:r>
+            <a:r>
+              <a:rPr dirty="0"/>
+              <a:t>;</a:t>
+            </a:r>
+          </a:p>
+          <a:p>
+            <a:pPr marL="342900" lvl="0" indent="-342900">
+              <a:buAutoNum type="arabicPeriod"/>
+            </a:pPr>
+            <a:r>
+              <a:rPr dirty="0" err="1"/>
+              <a:t>источники</a:t>
+            </a:r>
+            <a:r>
+              <a:rPr dirty="0"/>
+              <a:t> </a:t>
+            </a:r>
+            <a:r>
+              <a:rPr dirty="0" err="1"/>
+              <a:t>фактов</a:t>
+            </a:r>
+            <a:r>
+              <a:rPr dirty="0"/>
+              <a:t> </a:t>
+            </a:r>
+            <a:r>
+              <a:rPr dirty="0" err="1"/>
+              <a:t>известны</a:t>
+            </a:r>
+            <a:r>
+              <a:rPr dirty="0"/>
+              <a:t>;</a:t>
+            </a:r>
+          </a:p>
+          <a:p>
+            <a:pPr marL="342900" lvl="0" indent="-342900">
+              <a:buAutoNum type="arabicPeriod"/>
+            </a:pPr>
+            <a:r>
+              <a:rPr dirty="0" err="1"/>
+              <a:t>неустранённые</a:t>
+            </a:r>
+            <a:r>
+              <a:rPr dirty="0"/>
+              <a:t> </a:t>
+            </a:r>
+            <a:r>
+              <a:rPr dirty="0" err="1"/>
+              <a:t>пробелы</a:t>
+            </a:r>
+            <a:r>
+              <a:rPr dirty="0"/>
+              <a:t> </a:t>
+            </a:r>
+            <a:r>
+              <a:rPr dirty="0" err="1"/>
+              <a:t>не</a:t>
+            </a:r>
+            <a:r>
+              <a:rPr dirty="0"/>
+              <a:t> </a:t>
+            </a:r>
+            <a:r>
+              <a:rPr dirty="0" err="1"/>
+              <a:t>искажают</a:t>
+            </a:r>
+            <a:r>
+              <a:rPr dirty="0"/>
+              <a:t> </a:t>
+            </a:r>
+            <a:r>
+              <a:rPr dirty="0" err="1"/>
+              <a:t>расчёт</a:t>
+            </a:r>
+            <a:r>
+              <a:rPr dirty="0"/>
+              <a:t>.</a:t>
             </a:r>
           </a:p>
           <a:p>
@@ -5729,7 +6081,64 @@
               <a:buNone/>
             </a:pPr>
             <a:r>
-              <a:t>Результат: совпадение подтверждено / не подтверждено / недостаточно данных.</a:t>
+              <a:rPr dirty="0" err="1"/>
+              <a:t>Если</a:t>
+            </a:r>
+            <a:r>
+              <a:rPr dirty="0"/>
+              <a:t> </a:t>
+            </a:r>
+            <a:r>
+              <a:rPr dirty="0" err="1"/>
+              <a:t>условие</a:t>
+            </a:r>
+            <a:r>
+              <a:rPr dirty="0"/>
+              <a:t> </a:t>
+            </a:r>
+            <a:r>
+              <a:rPr dirty="0" err="1"/>
+              <a:t>не</a:t>
+            </a:r>
+            <a:r>
+              <a:rPr dirty="0"/>
+              <a:t> </a:t>
+            </a:r>
+            <a:r>
+              <a:rPr dirty="0" err="1"/>
+              <a:t>выполнено</a:t>
+            </a:r>
+            <a:r>
+              <a:rPr dirty="0"/>
+              <a:t>, </a:t>
+            </a:r>
+            <a:r>
+              <a:rPr dirty="0" err="1"/>
+              <a:t>результат</a:t>
+            </a:r>
+            <a:r>
+              <a:rPr lang="ru-RU" dirty="0"/>
+              <a:t>:</a:t>
+            </a:r>
+            <a:r>
+              <a:rPr dirty="0"/>
+              <a:t>  </a:t>
+            </a:r>
+            <a:r>
+              <a:rPr dirty="0" err="1"/>
+              <a:t>запрос</a:t>
+            </a:r>
+            <a:r>
+              <a:rPr dirty="0"/>
+              <a:t> </a:t>
+            </a:r>
+            <a:r>
+              <a:rPr dirty="0" err="1"/>
+              <a:t>уточнений</a:t>
+            </a:r>
+            <a:r>
+              <a:rPr dirty="0"/>
+              <a:t>.</a:t>
             </a:r>
           </a:p>
         </p:txBody>
@@ -5739,7 +6148,7 @@
           <p:cNvPr id="4" name="Номер слайда 3">
             <a:extLst>
               <a:ext uri="{FF2B5EF4-FFF2-40B4-BE49-F238E27FC236}">
-                <a16:creationId xmlns:a16="http://schemas.microsoft.com/office/drawing/2014/main" id="{B455B719-F4A5-49CC-91B5-4CABA686E713}"/>
+                <a16:creationId xmlns:a16="http://schemas.microsoft.com/office/drawing/2014/main" id="{3754475E-B5C2-45CA-909C-CA8736E40583}"/>
               </a:ext>
             </a:extLst>
           </p:cNvPr>
@@ -5772,6 +6181,146 @@
 </file>
 
 <file path=ppt/slides/slide6.xml><?xml version="1.0" encoding="utf-8"?>
+<p:sld xmlns:a="http://schemas.openxmlformats.org/drawingml/2006/main" xmlns:r="http://schemas.openxmlformats.org/officeDocument/2006/relationships" xmlns:p="http://schemas.openxmlformats.org/presentationml/2006/main">
+  <p:cSld>
+    <p:spTree>
+      <p:nvGrpSpPr>
+        <p:cNvPr id="1" name=""/>
+        <p:cNvGrpSpPr/>
+        <p:nvPr/>
+      </p:nvGrpSpPr>
+      <p:grpSpPr>
+        <a:xfrm>
+          <a:off x="0" y="0"/>
+          <a:ext cx="0" cy="0"/>
+          <a:chOff x="0" y="0"/>
+          <a:chExt cx="0" cy="0"/>
+        </a:xfrm>
+      </p:grpSpPr>
+      <p:sp>
+        <p:nvSpPr>
+          <p:cNvPr id="2" name="Title 1"/>
+          <p:cNvSpPr>
+            <a:spLocks noGrp="1"/>
+          </p:cNvSpPr>
+          <p:nvPr>
+            <p:ph type="title"/>
+          </p:nvPr>
+        </p:nvSpPr>
+        <p:spPr/>
+        <p:txBody>
+          <a:bodyPr/>
+          <a:lstStyle/>
+          <a:p>
+            <a:pPr marL="0" lvl="0" indent="0">
+              <a:buNone/>
+            </a:pPr>
+            <a:r>
+              <a:t>Шаг 2. Сопоставление с перечнем</a:t>
+            </a:r>
+          </a:p>
+        </p:txBody>
+      </p:sp>
+      <p:sp>
+        <p:nvSpPr>
+          <p:cNvPr id="3" name="Content Placeholder 2"/>
+          <p:cNvSpPr>
+            <a:spLocks noGrp="1"/>
+          </p:cNvSpPr>
+          <p:nvPr>
+            <p:ph idx="1"/>
+          </p:nvPr>
+        </p:nvSpPr>
+        <p:spPr/>
+        <p:txBody>
+          <a:bodyPr/>
+          <a:lstStyle/>
+          <a:p>
+            <a:pPr marL="0" lvl="0" indent="0">
+              <a:buNone/>
+            </a:pPr>
+            <a:r>
+              <a:t>Сопоставляйте объект не по одному названию, а по совокупности признаков:</a:t>
+            </a:r>
+          </a:p>
+          <a:p>
+            <a:pPr lvl="0"/>
+            <a:r>
+              <a:t>виду объекта;</a:t>
+            </a:r>
+          </a:p>
+          <a:p>
+            <a:pPr lvl="0"/>
+            <a:r>
+              <a:t>функции или процессу;</a:t>
+            </a:r>
+          </a:p>
+          <a:p>
+            <a:pPr lvl="0"/>
+            <a:r>
+              <a:t>сфере деятельности;</a:t>
+            </a:r>
+          </a:p>
+          <a:p>
+            <a:pPr lvl="0"/>
+            <a:r>
+              <a:t>признакам, указанным в действующей версии типового перечня;</a:t>
+            </a:r>
+          </a:p>
+          <a:p>
+            <a:pPr lvl="0"/>
+            <a:r>
+              <a:t>отраслевым особенностям, если они применимы.</a:t>
+            </a:r>
+          </a:p>
+          <a:p>
+            <a:pPr marL="0" lvl="0" indent="0">
+              <a:buNone/>
+            </a:pPr>
+            <a:r>
+              <a:t>Результат: совпадение подтверждено / не подтверждено / недостаточно данных.</a:t>
+            </a:r>
+          </a:p>
+        </p:txBody>
+      </p:sp>
+      <p:sp>
+        <p:nvSpPr>
+          <p:cNvPr id="4" name="Номер слайда 3">
+            <a:extLst>
+              <a:ext uri="{FF2B5EF4-FFF2-40B4-BE49-F238E27FC236}">
+                <a16:creationId xmlns:a16="http://schemas.microsoft.com/office/drawing/2014/main" id="{B455B719-F4A5-49CC-91B5-4CABA686E713}"/>
+              </a:ext>
+            </a:extLst>
+          </p:cNvPr>
+          <p:cNvSpPr>
+            <a:spLocks noGrp="1"/>
+          </p:cNvSpPr>
+          <p:nvPr>
+            <p:ph type="sldNum" sz="quarter" idx="12"/>
+          </p:nvPr>
+        </p:nvSpPr>
+        <p:spPr/>
+        <p:txBody>
+          <a:bodyPr/>
+          <a:lstStyle/>
+          <a:p>
+            <a:fld id="{C5EF2332-01BF-834F-8236-50238282D533}" type="slidenum">
+              <a:rPr lang="en-US" smtClean="0"/>
+              <a:t>6</a:t>
+            </a:fld>
+            <a:endParaRPr lang="en-US"/>
+          </a:p>
+        </p:txBody>
+      </p:sp>
+    </p:spTree>
+  </p:cSld>
+  <p:clrMapOvr>
+    <a:masterClrMapping/>
+  </p:clrMapOvr>
+</p:sld>
+</file>
+
+<file path=ppt/slides/slide7.xml><?xml version="1.0" encoding="utf-8"?>
 <p:sld xmlns:a="http://schemas.openxmlformats.org/drawingml/2006/main" xmlns:r="http://schemas.openxmlformats.org/officeDocument/2006/relationships" xmlns:p="http://schemas.openxmlformats.org/presentationml/2006/main">
   <p:cSld>
     <p:spTree>
@@ -6279,477 +6828,6 @@
           <a:p>
             <a:fld id="{C5EF2332-01BF-834F-8236-50238282D533}" type="slidenum">
               <a:rPr lang="en-US" smtClean="0"/>
-              <a:t>6</a:t>
-            </a:fld>
-            <a:endParaRPr lang="en-US"/>
-          </a:p>
-        </p:txBody>
-      </p:sp>
-    </p:spTree>
-  </p:cSld>
-  <p:clrMapOvr>
-    <a:masterClrMapping/>
-  </p:clrMapOvr>
-</p:sld>
-</file>
-
-<file path=ppt/slides/slide7.xml><?xml version="1.0" encoding="utf-8"?>
-<p:sld xmlns:a="http://schemas.openxmlformats.org/drawingml/2006/main" xmlns:r="http://schemas.openxmlformats.org/officeDocument/2006/relationships" xmlns:p="http://schemas.openxmlformats.org/presentationml/2006/main">
-  <p:cSld>
-    <p:spTree>
-      <p:nvGrpSpPr>
-        <p:cNvPr id="1" name=""/>
-        <p:cNvGrpSpPr/>
-        <p:nvPr/>
-      </p:nvGrpSpPr>
-      <p:grpSpPr>
-        <a:xfrm>
-          <a:off x="0" y="0"/>
-          <a:ext cx="0" cy="0"/>
-          <a:chOff x="0" y="0"/>
-          <a:chExt cx="0" cy="0"/>
-        </a:xfrm>
-      </p:grpSpPr>
-      <p:sp>
-        <p:nvSpPr>
-          <p:cNvPr id="2" name="Title 1"/>
-          <p:cNvSpPr>
-            <a:spLocks noGrp="1"/>
-          </p:cNvSpPr>
-          <p:nvPr>
-            <p:ph type="title"/>
-          </p:nvPr>
-        </p:nvSpPr>
-        <p:spPr/>
-        <p:txBody>
-          <a:bodyPr/>
-          <a:lstStyle/>
-          <a:p>
-            <a:pPr marL="0" lvl="0" indent="0">
-              <a:buNone/>
-            </a:pPr>
-            <a:r>
-              <a:t>Шаг 4. Решение и сведения</a:t>
-            </a:r>
-          </a:p>
-        </p:txBody>
-      </p:sp>
-      <p:sp>
-        <p:nvSpPr>
-          <p:cNvPr id="3" name="Content Placeholder 2"/>
-          <p:cNvSpPr>
-            <a:spLocks noGrp="1"/>
-          </p:cNvSpPr>
-          <p:nvPr>
-            <p:ph idx="1"/>
-          </p:nvPr>
-        </p:nvSpPr>
-        <p:spPr/>
-        <p:txBody>
-          <a:bodyPr>
-            <a:normAutofit lnSpcReduction="10000"/>
-          </a:bodyPr>
-          <a:lstStyle/>
-          <a:p>
-            <a:pPr marL="0" lvl="0" indent="0">
-              <a:buNone/>
-            </a:pPr>
-            <a:r>
-              <a:rPr dirty="0" err="1"/>
-              <a:t>Карточка</a:t>
-            </a:r>
-            <a:r>
-              <a:rPr dirty="0"/>
-              <a:t> </a:t>
-            </a:r>
-            <a:r>
-              <a:rPr dirty="0" err="1"/>
-              <a:t>решения</a:t>
-            </a:r>
-            <a:r>
-              <a:rPr dirty="0"/>
-              <a:t> </a:t>
-            </a:r>
-            <a:r>
-              <a:rPr dirty="0" err="1"/>
-              <a:t>фиксирует</a:t>
-            </a:r>
-            <a:r>
-              <a:rPr dirty="0"/>
-              <a:t>:</a:t>
-            </a:r>
-          </a:p>
-          <a:p>
-            <a:pPr lvl="0"/>
-            <a:r>
-              <a:rPr dirty="0" err="1"/>
-              <a:t>выбранный</a:t>
-            </a:r>
-            <a:r>
-              <a:rPr dirty="0"/>
-              <a:t> </a:t>
-            </a:r>
-            <a:r>
-              <a:rPr dirty="0" err="1"/>
-              <a:t>объект</a:t>
-            </a:r>
-            <a:r>
-              <a:rPr dirty="0"/>
-              <a:t> и </a:t>
-            </a:r>
-            <a:r>
-              <a:rPr dirty="0" err="1"/>
-              <a:t>его</a:t>
-            </a:r>
-            <a:r>
-              <a:rPr dirty="0"/>
-              <a:t> </a:t>
-            </a:r>
-            <a:r>
-              <a:rPr dirty="0" err="1"/>
-              <a:t>границы</a:t>
-            </a:r>
-            <a:r>
-              <a:rPr dirty="0"/>
-              <a:t>;</a:t>
-            </a:r>
-          </a:p>
-          <a:p>
-            <a:pPr lvl="0"/>
-            <a:r>
-              <a:rPr dirty="0" err="1"/>
-              <a:t>сопоставление</a:t>
-            </a:r>
-            <a:r>
-              <a:rPr dirty="0"/>
-              <a:t> с </a:t>
-            </a:r>
-            <a:r>
-              <a:rPr dirty="0" err="1"/>
-              <a:t>типовым</a:t>
-            </a:r>
-            <a:r>
-              <a:rPr dirty="0"/>
-              <a:t> </a:t>
-            </a:r>
-            <a:r>
-              <a:rPr dirty="0" err="1"/>
-              <a:t>объектом</a:t>
-            </a:r>
-            <a:r>
-              <a:rPr dirty="0"/>
-              <a:t> </a:t>
-            </a:r>
-            <a:r>
-              <a:rPr dirty="0" err="1"/>
-              <a:t>или</a:t>
-            </a:r>
-            <a:r>
-              <a:rPr dirty="0"/>
-              <a:t> </a:t>
-            </a:r>
-            <a:r>
-              <a:rPr dirty="0" err="1"/>
-              <a:t>обоснование</a:t>
-            </a:r>
-            <a:r>
-              <a:rPr dirty="0"/>
-              <a:t> </a:t>
-            </a:r>
-            <a:r>
-              <a:rPr dirty="0" err="1"/>
-              <a:t>нетипового</a:t>
-            </a:r>
-            <a:r>
-              <a:rPr dirty="0"/>
-              <a:t> </a:t>
-            </a:r>
-            <a:r>
-              <a:rPr dirty="0" err="1"/>
-              <a:t>случая</a:t>
-            </a:r>
-            <a:r>
-              <a:rPr dirty="0"/>
-              <a:t>;</a:t>
-            </a:r>
-          </a:p>
-          <a:p>
-            <a:pPr lvl="0"/>
-            <a:r>
-              <a:rPr dirty="0" err="1"/>
-              <a:t>применённые</a:t>
-            </a:r>
-            <a:r>
-              <a:rPr dirty="0"/>
-              <a:t> </a:t>
-            </a:r>
-            <a:r>
-              <a:rPr dirty="0" err="1"/>
-              <a:t>показатели</a:t>
-            </a:r>
-            <a:r>
-              <a:rPr dirty="0"/>
-              <a:t> и </a:t>
-            </a:r>
-            <a:r>
-              <a:rPr dirty="0" err="1"/>
-              <a:t>расчёт</a:t>
-            </a:r>
-            <a:r>
-              <a:rPr dirty="0"/>
-              <a:t>;</a:t>
-            </a:r>
-          </a:p>
-          <a:p>
-            <a:pPr lvl="0"/>
-            <a:r>
-              <a:rPr dirty="0" err="1"/>
-              <a:t>категорию</a:t>
-            </a:r>
-            <a:r>
-              <a:rPr dirty="0"/>
-              <a:t> </a:t>
-            </a:r>
-            <a:r>
-              <a:rPr dirty="0" err="1"/>
-              <a:t>либо</a:t>
-            </a:r>
-            <a:r>
-              <a:rPr dirty="0"/>
-              <a:t> </a:t>
-            </a:r>
-            <a:r>
-              <a:rPr dirty="0" err="1"/>
-              <a:t>обоснование</a:t>
-            </a:r>
-            <a:r>
-              <a:rPr dirty="0"/>
-              <a:t> </a:t>
-            </a:r>
-            <a:r>
-              <a:rPr dirty="0" err="1"/>
-              <a:t>её</a:t>
-            </a:r>
-            <a:r>
-              <a:rPr dirty="0"/>
-              <a:t> </a:t>
-            </a:r>
-            <a:r>
-              <a:rPr dirty="0" err="1"/>
-              <a:t>отсутствия</a:t>
-            </a:r>
-            <a:r>
-              <a:rPr dirty="0"/>
-              <a:t>;</a:t>
-            </a:r>
-          </a:p>
-          <a:p>
-            <a:pPr lvl="0"/>
-            <a:r>
-              <a:rPr dirty="0" err="1"/>
-              <a:t>доказательства</a:t>
-            </a:r>
-            <a:r>
-              <a:rPr dirty="0"/>
-              <a:t> и </a:t>
-            </a:r>
-            <a:r>
-              <a:rPr dirty="0" err="1"/>
-              <a:t>ограничения</a:t>
-            </a:r>
-            <a:r>
-              <a:rPr dirty="0"/>
-              <a:t>;</a:t>
-            </a:r>
-          </a:p>
-          <a:p>
-            <a:pPr lvl="0"/>
-            <a:r>
-              <a:rPr dirty="0" err="1"/>
-              <a:t>сведения</a:t>
-            </a:r>
-            <a:r>
-              <a:rPr dirty="0"/>
-              <a:t>, </a:t>
-            </a:r>
-            <a:r>
-              <a:rPr dirty="0" err="1"/>
-              <a:t>подлежащие</a:t>
-            </a:r>
-            <a:r>
-              <a:rPr dirty="0"/>
-              <a:t> </a:t>
-            </a:r>
-            <a:r>
-              <a:rPr dirty="0" err="1"/>
-              <a:t>направлению</a:t>
-            </a:r>
-            <a:r>
-              <a:rPr dirty="0"/>
-              <a:t>, и </a:t>
-            </a:r>
-            <a:r>
-              <a:rPr dirty="0" err="1"/>
-              <a:t>адресата</a:t>
-            </a:r>
-            <a:r>
-              <a:rPr dirty="0"/>
-              <a:t>;</a:t>
-            </a:r>
-          </a:p>
-          <a:p>
-            <a:pPr lvl="0"/>
-            <a:r>
-              <a:rPr dirty="0" err="1"/>
-              <a:t>владельца</a:t>
-            </a:r>
-            <a:r>
-              <a:rPr dirty="0"/>
-              <a:t> </a:t>
-            </a:r>
-            <a:r>
-              <a:rPr dirty="0" err="1"/>
-              <a:t>решения</a:t>
-            </a:r>
-            <a:r>
-              <a:rPr dirty="0"/>
-              <a:t> и </a:t>
-            </a:r>
-            <a:r>
-              <a:rPr dirty="0" err="1"/>
-              <a:t>дату</a:t>
-            </a:r>
-            <a:r>
-              <a:rPr dirty="0"/>
-              <a:t> </a:t>
-            </a:r>
-            <a:r>
-              <a:rPr dirty="0" err="1"/>
-              <a:t>пересмотра</a:t>
-            </a:r>
-            <a:r>
-              <a:rPr dirty="0"/>
-              <a:t>.</a:t>
-            </a:r>
-          </a:p>
-          <a:p>
-            <a:pPr marL="0" lvl="0" indent="0">
-              <a:buNone/>
-            </a:pPr>
-            <a:r>
-              <a:rPr i="1" dirty="0" err="1"/>
-              <a:t>Учебная</a:t>
-            </a:r>
-            <a:r>
-              <a:rPr i="1" dirty="0"/>
-              <a:t> </a:t>
-            </a:r>
-            <a:r>
-              <a:rPr i="1" dirty="0" err="1"/>
-              <a:t>карточка</a:t>
-            </a:r>
-            <a:r>
-              <a:rPr i="1" dirty="0"/>
-              <a:t> </a:t>
-            </a:r>
-            <a:r>
-              <a:rPr i="1" dirty="0" err="1"/>
-              <a:t>не</a:t>
-            </a:r>
-            <a:r>
-              <a:rPr i="1" dirty="0"/>
-              <a:t> </a:t>
-            </a:r>
-            <a:r>
-              <a:rPr i="1" dirty="0" err="1"/>
-              <a:t>заменяет</a:t>
-            </a:r>
-            <a:r>
-              <a:rPr i="1" dirty="0"/>
-              <a:t> </a:t>
-            </a:r>
-            <a:r>
-              <a:rPr i="1" dirty="0" err="1"/>
-              <a:t>форму</a:t>
-            </a:r>
-            <a:r>
-              <a:rPr i="1" dirty="0"/>
-              <a:t> </a:t>
-            </a:r>
-            <a:r>
-              <a:rPr i="1" dirty="0" err="1"/>
-              <a:t>регулятора</a:t>
-            </a:r>
-            <a:r>
-              <a:rPr i="1" dirty="0"/>
-              <a:t> и </a:t>
-            </a:r>
-            <a:r>
-              <a:rPr i="1" dirty="0" err="1"/>
-              <a:t>не</a:t>
-            </a:r>
-            <a:r>
-              <a:rPr i="1" dirty="0"/>
-              <a:t> </a:t>
-            </a:r>
-            <a:r>
-              <a:rPr i="1" dirty="0" err="1"/>
-              <a:t>является</a:t>
-            </a:r>
-            <a:r>
-              <a:rPr i="1" dirty="0"/>
-              <a:t> </a:t>
-            </a:r>
-            <a:r>
-              <a:rPr i="1" dirty="0" err="1"/>
-              <a:t>решением</a:t>
-            </a:r>
-            <a:r>
-              <a:rPr i="1" dirty="0"/>
-              <a:t> </a:t>
-            </a:r>
-            <a:r>
-              <a:rPr i="1" dirty="0" err="1"/>
-              <a:t>уполномоченного</a:t>
-            </a:r>
-            <a:r>
-              <a:rPr i="1" dirty="0"/>
-              <a:t> </a:t>
-            </a:r>
-            <a:r>
-              <a:rPr i="1" dirty="0" err="1"/>
-              <a:t>органа</a:t>
-            </a:r>
-            <a:r>
-              <a:rPr dirty="0"/>
-              <a:t>.</a:t>
-            </a:r>
-          </a:p>
-        </p:txBody>
-      </p:sp>
-      <p:sp>
-        <p:nvSpPr>
-          <p:cNvPr id="4" name="Номер слайда 3">
-            <a:extLst>
-              <a:ext uri="{FF2B5EF4-FFF2-40B4-BE49-F238E27FC236}">
-                <a16:creationId xmlns:a16="http://schemas.microsoft.com/office/drawing/2014/main" id="{95CAAAAA-3975-48B8-B4E5-470E5B4A35D1}"/>
-              </a:ext>
-            </a:extLst>
-          </p:cNvPr>
-          <p:cNvSpPr>
-            <a:spLocks noGrp="1"/>
-          </p:cNvSpPr>
-          <p:nvPr>
-            <p:ph type="sldNum" sz="quarter" idx="12"/>
-          </p:nvPr>
-        </p:nvSpPr>
-        <p:spPr/>
-        <p:txBody>
-          <a:bodyPr/>
-          <a:lstStyle/>
-          <a:p>
-            <a:fld id="{C5EF2332-01BF-834F-8236-50238282D533}" type="slidenum">
-              <a:rPr lang="en-US" smtClean="0"/>
               <a:t>7</a:t>
             </a:fld>
             <a:endParaRPr lang="en-US"/>
@@ -6800,7 +6878,7 @@
               <a:buNone/>
             </a:pPr>
             <a:r>
-              <a:t>Нетиповой объект</a:t>
+              <a:t>Шаг 4. Решение и сведения</a:t>
             </a:r>
           </a:p>
         </p:txBody>
@@ -6817,14 +6895,290 @@
         </p:nvSpPr>
         <p:spPr/>
         <p:txBody>
-          <a:bodyPr/>
+          <a:bodyPr>
+            <a:normAutofit lnSpcReduction="10000"/>
+          </a:bodyPr>
           <a:lstStyle/>
           <a:p>
             <a:pPr marL="0" lvl="0" indent="0">
               <a:buNone/>
             </a:pPr>
             <a:r>
-              <a:t>Если объект не совпал с типовым перечнем, нельзя автоматически исключать его из оценки.</a:t>
+              <a:rPr dirty="0" err="1"/>
+              <a:t>Карточка</a:t>
+            </a:r>
+            <a:r>
+              <a:rPr dirty="0"/>
+              <a:t> </a:t>
+            </a:r>
+            <a:r>
+              <a:rPr dirty="0" err="1"/>
+              <a:t>решения</a:t>
+            </a:r>
+            <a:r>
+              <a:rPr dirty="0"/>
+              <a:t> </a:t>
+            </a:r>
+            <a:r>
+              <a:rPr dirty="0" err="1"/>
+              <a:t>фиксирует</a:t>
+            </a:r>
+            <a:r>
+              <a:rPr dirty="0"/>
+              <a:t>:</a:t>
+            </a:r>
+          </a:p>
+          <a:p>
+            <a:pPr lvl="0"/>
+            <a:r>
+              <a:rPr dirty="0" err="1"/>
+              <a:t>выбранный</a:t>
+            </a:r>
+            <a:r>
+              <a:rPr dirty="0"/>
+              <a:t> </a:t>
+            </a:r>
+            <a:r>
+              <a:rPr dirty="0" err="1"/>
+              <a:t>объект</a:t>
+            </a:r>
+            <a:r>
+              <a:rPr dirty="0"/>
+              <a:t> и </a:t>
+            </a:r>
+            <a:r>
+              <a:rPr dirty="0" err="1"/>
+              <a:t>его</a:t>
+            </a:r>
+            <a:r>
+              <a:rPr dirty="0"/>
+              <a:t> </a:t>
+            </a:r>
+            <a:r>
+              <a:rPr dirty="0" err="1"/>
+              <a:t>границы</a:t>
+            </a:r>
+            <a:r>
+              <a:rPr dirty="0"/>
+              <a:t>;</a:t>
+            </a:r>
+          </a:p>
+          <a:p>
+            <a:pPr lvl="0"/>
+            <a:r>
+              <a:rPr dirty="0" err="1"/>
+              <a:t>сопоставление</a:t>
+            </a:r>
+            <a:r>
+              <a:rPr dirty="0"/>
+              <a:t> с </a:t>
+            </a:r>
+            <a:r>
+              <a:rPr dirty="0" err="1"/>
+              <a:t>типовым</a:t>
+            </a:r>
+            <a:r>
+              <a:rPr dirty="0"/>
+              <a:t> </a:t>
+            </a:r>
+            <a:r>
+              <a:rPr dirty="0" err="1"/>
+              <a:t>объектом</a:t>
+            </a:r>
+            <a:r>
+              <a:rPr dirty="0"/>
+              <a:t> </a:t>
+            </a:r>
+            <a:r>
+              <a:rPr dirty="0" err="1"/>
+              <a:t>или</a:t>
+            </a:r>
+            <a:r>
+              <a:rPr dirty="0"/>
+              <a:t> </a:t>
+            </a:r>
+            <a:r>
+              <a:rPr dirty="0" err="1"/>
+              <a:t>обоснование</a:t>
+            </a:r>
+            <a:r>
+              <a:rPr dirty="0"/>
+              <a:t> </a:t>
+            </a:r>
+            <a:r>
+              <a:rPr dirty="0" err="1"/>
+              <a:t>нетипового</a:t>
+            </a:r>
+            <a:r>
+              <a:rPr dirty="0"/>
+              <a:t> </a:t>
+            </a:r>
+            <a:r>
+              <a:rPr dirty="0" err="1"/>
+              <a:t>случая</a:t>
+            </a:r>
+            <a:r>
+              <a:rPr dirty="0"/>
+              <a:t>;</a:t>
+            </a:r>
+          </a:p>
+          <a:p>
+            <a:pPr lvl="0"/>
+            <a:r>
+              <a:rPr dirty="0" err="1"/>
+              <a:t>применённые</a:t>
+            </a:r>
+            <a:r>
+              <a:rPr dirty="0"/>
+              <a:t> </a:t>
+            </a:r>
+            <a:r>
+              <a:rPr dirty="0" err="1"/>
+              <a:t>показатели</a:t>
+            </a:r>
+            <a:r>
+              <a:rPr dirty="0"/>
+              <a:t> и </a:t>
+            </a:r>
+            <a:r>
+              <a:rPr dirty="0" err="1"/>
+              <a:t>расчёт</a:t>
+            </a:r>
+            <a:r>
+              <a:rPr dirty="0"/>
+              <a:t>;</a:t>
+            </a:r>
+          </a:p>
+          <a:p>
+            <a:pPr lvl="0"/>
+            <a:r>
+              <a:rPr dirty="0" err="1"/>
+              <a:t>категорию</a:t>
+            </a:r>
+            <a:r>
+              <a:rPr dirty="0"/>
+              <a:t> </a:t>
+            </a:r>
+            <a:r>
+              <a:rPr dirty="0" err="1"/>
+              <a:t>либо</a:t>
+            </a:r>
+            <a:r>
+              <a:rPr dirty="0"/>
+              <a:t> </a:t>
+            </a:r>
+            <a:r>
+              <a:rPr dirty="0" err="1"/>
+              <a:t>обоснование</a:t>
+            </a:r>
+            <a:r>
+              <a:rPr dirty="0"/>
+              <a:t> </a:t>
+            </a:r>
+            <a:r>
+              <a:rPr dirty="0" err="1"/>
+              <a:t>её</a:t>
+            </a:r>
+            <a:r>
+              <a:rPr dirty="0"/>
+              <a:t> </a:t>
+            </a:r>
+            <a:r>
+              <a:rPr dirty="0" err="1"/>
+              <a:t>отсутствия</a:t>
+            </a:r>
+            <a:r>
+              <a:rPr dirty="0"/>
+              <a:t>;</a:t>
+            </a:r>
+          </a:p>
+          <a:p>
+            <a:pPr lvl="0"/>
+            <a:r>
+              <a:rPr dirty="0" err="1"/>
+              <a:t>доказательства</a:t>
+            </a:r>
+            <a:r>
+              <a:rPr dirty="0"/>
+              <a:t> и </a:t>
+            </a:r>
+            <a:r>
+              <a:rPr dirty="0" err="1"/>
+              <a:t>ограничения</a:t>
+            </a:r>
+            <a:r>
+              <a:rPr dirty="0"/>
+              <a:t>;</a:t>
+            </a:r>
+          </a:p>
+          <a:p>
+            <a:pPr lvl="0"/>
+            <a:r>
+              <a:rPr dirty="0" err="1"/>
+              <a:t>сведения</a:t>
+            </a:r>
+            <a:r>
+              <a:rPr dirty="0"/>
+              <a:t>, </a:t>
+            </a:r>
+            <a:r>
+              <a:rPr dirty="0" err="1"/>
+              <a:t>подлежащие</a:t>
+            </a:r>
+            <a:r>
+              <a:rPr dirty="0"/>
+              <a:t> </a:t>
+            </a:r>
+            <a:r>
+              <a:rPr dirty="0" err="1"/>
+              <a:t>направлению</a:t>
+            </a:r>
+            <a:r>
+              <a:rPr dirty="0"/>
+              <a:t>, и </a:t>
+            </a:r>
+            <a:r>
+              <a:rPr dirty="0" err="1"/>
+              <a:t>адресата</a:t>
+            </a:r>
+            <a:r>
+              <a:rPr dirty="0"/>
+              <a:t>;</a:t>
+            </a:r>
+          </a:p>
+          <a:p>
+            <a:pPr lvl="0"/>
+            <a:r>
+              <a:rPr dirty="0" err="1"/>
+              <a:t>владельца</a:t>
+            </a:r>
+            <a:r>
+              <a:rPr dirty="0"/>
+              <a:t> </a:t>
+            </a:r>
+            <a:r>
+              <a:rPr dirty="0" err="1"/>
+              <a:t>решения</a:t>
+            </a:r>
+            <a:r>
+              <a:rPr dirty="0"/>
+              <a:t> и </a:t>
+            </a:r>
+            <a:r>
+              <a:rPr dirty="0" err="1"/>
+              <a:t>дату</a:t>
+            </a:r>
+            <a:r>
+              <a:rPr dirty="0"/>
+              <a:t> </a:t>
+            </a:r>
+            <a:r>
+              <a:rPr dirty="0" err="1"/>
+              <a:t>пересмотра</a:t>
+            </a:r>
+            <a:r>
+              <a:rPr dirty="0"/>
+              <a:t>.</a:t>
             </a:r>
           </a:p>
           <a:p>
@@ -6832,39 +7186,92 @@
               <a:buNone/>
             </a:pPr>
             <a:r>
-              <a:t>Нужно:</a:t>
-            </a:r>
-          </a:p>
-          <a:p>
-            <a:pPr marL="342900" lvl="0" indent="-342900">
-              <a:buAutoNum type="arabicPeriod"/>
-            </a:pPr>
-            <a:r>
-              <a:t>зафиксировать результат и основания несопоставимости;</a:t>
-            </a:r>
-          </a:p>
-          <a:p>
-            <a:pPr marL="342900" lvl="0" indent="-342900">
-              <a:buAutoNum type="arabicPeriod"/>
-            </a:pPr>
-            <a:r>
-              <a:t>проверить, предусмотрен ли действующими правилами специальный порядок для нетиповых или вновь создаваемых объектов;</a:t>
-            </a:r>
-          </a:p>
-          <a:p>
-            <a:pPr marL="342900" lvl="0" indent="-342900">
-              <a:buAutoNum type="arabicPeriod"/>
-            </a:pPr>
-            <a:r>
-              <a:t>оценить последствия по применимым показателям;</a:t>
-            </a:r>
-          </a:p>
-          <a:p>
-            <a:pPr marL="342900" lvl="0" indent="-342900">
-              <a:buAutoNum type="arabicPeriod"/>
-            </a:pPr>
-            <a:r>
-              <a:t>оформить требуемые сведения и предложение по уточнению перечня — если это предусмотрено действующей процедурой.</a:t>
+              <a:rPr i="1" dirty="0" err="1"/>
+              <a:t>Учебная</a:t>
+            </a:r>
+            <a:r>
+              <a:rPr i="1" dirty="0"/>
+              <a:t> </a:t>
+            </a:r>
+            <a:r>
+              <a:rPr i="1" dirty="0" err="1"/>
+              <a:t>карточка</a:t>
+            </a:r>
+            <a:r>
+              <a:rPr i="1" dirty="0"/>
+              <a:t> </a:t>
+            </a:r>
+            <a:r>
+              <a:rPr i="1" dirty="0" err="1"/>
+              <a:t>не</a:t>
+            </a:r>
+            <a:r>
+              <a:rPr i="1" dirty="0"/>
+              <a:t> </a:t>
+            </a:r>
+            <a:r>
+              <a:rPr i="1" dirty="0" err="1"/>
+              <a:t>заменяет</a:t>
+            </a:r>
+            <a:r>
+              <a:rPr i="1" dirty="0"/>
+              <a:t> </a:t>
+            </a:r>
+            <a:r>
+              <a:rPr i="1" dirty="0" err="1"/>
+              <a:t>форму</a:t>
+            </a:r>
+            <a:r>
+              <a:rPr i="1" dirty="0"/>
+              <a:t> </a:t>
+            </a:r>
+            <a:r>
+              <a:rPr i="1" dirty="0" err="1"/>
+              <a:t>регулятора</a:t>
+            </a:r>
+            <a:r>
+              <a:rPr i="1" dirty="0"/>
+              <a:t> и </a:t>
+            </a:r>
+            <a:r>
+              <a:rPr i="1" dirty="0" err="1"/>
+              <a:t>не</a:t>
+            </a:r>
+            <a:r>
+              <a:rPr i="1" dirty="0"/>
+              <a:t> </a:t>
+            </a:r>
+            <a:r>
+              <a:rPr i="1" dirty="0" err="1"/>
+              <a:t>является</a:t>
+            </a:r>
+            <a:r>
+              <a:rPr i="1" dirty="0"/>
+              <a:t> </a:t>
+            </a:r>
+            <a:r>
+              <a:rPr i="1" dirty="0" err="1"/>
+              <a:t>решением</a:t>
+            </a:r>
+            <a:r>
+              <a:rPr i="1" dirty="0"/>
+              <a:t> </a:t>
+            </a:r>
+            <a:r>
+              <a:rPr i="1" dirty="0" err="1"/>
+              <a:t>уполномоченного</a:t>
+            </a:r>
+            <a:r>
+              <a:rPr i="1" dirty="0"/>
+              <a:t> </a:t>
+            </a:r>
+            <a:r>
+              <a:rPr i="1" dirty="0" err="1"/>
+              <a:t>органа</a:t>
+            </a:r>
+            <a:r>
+              <a:rPr dirty="0"/>
+              <a:t>.</a:t>
             </a:r>
           </a:p>
         </p:txBody>
@@ -6874,7 +7281,7 @@
           <p:cNvPr id="4" name="Номер слайда 3">
             <a:extLst>
               <a:ext uri="{FF2B5EF4-FFF2-40B4-BE49-F238E27FC236}">
-                <a16:creationId xmlns:a16="http://schemas.microsoft.com/office/drawing/2014/main" id="{DE6F4C25-1D51-4160-B5A7-8A3E50DA5C4C}"/>
+                <a16:creationId xmlns:a16="http://schemas.microsoft.com/office/drawing/2014/main" id="{95CAAAAA-3975-48B8-B4E5-470E5B4A35D1}"/>
               </a:ext>
             </a:extLst>
           </p:cNvPr>
@@ -6942,7 +7349,7 @@
               <a:buNone/>
             </a:pPr>
             <a:r>
-              <a:t>Пересмотр</a:t>
+              <a:t>Нетиповой объект</a:t>
             </a:r>
           </a:p>
         </p:txBody>
@@ -6966,7 +7373,7 @@
               <a:buNone/>
             </a:pPr>
             <a:r>
-              <a:t>Пересмотр запускается не только календарной датой.</a:t>
+              <a:t>Если объект не совпал с типовым перечнем, нельзя автоматически исключать его из оценки.</a:t>
             </a:r>
           </a:p>
           <a:p>
@@ -6974,45 +7381,39 @@
               <a:buNone/>
             </a:pPr>
             <a:r>
-              <a:t>Триггеры могут включать:</a:t>
-            </a:r>
-          </a:p>
-          <a:p>
-            <a:pPr lvl="0"/>
-            <a:r>
-              <a:t>изменение границ, функции или владельца объекта;</a:t>
-            </a:r>
-          </a:p>
-          <a:p>
-            <a:pPr lvl="0"/>
-            <a:r>
-              <a:t>изменение пользователей, взаимосвязей или масштаба последствий;</a:t>
-            </a:r>
-          </a:p>
-          <a:p>
-            <a:pPr lvl="0"/>
-            <a:r>
-              <a:t>изменение показателей, правил или отраслевых особенностей;</a:t>
-            </a:r>
-          </a:p>
-          <a:p>
-            <a:pPr lvl="0"/>
-            <a:r>
-              <a:t>создание нового объекта или изменение типового перечня;</a:t>
-            </a:r>
-          </a:p>
-          <a:p>
-            <a:pPr lvl="0"/>
-            <a:r>
-              <a:t>результаты аудита, инцидента или проверки.</a:t>
-            </a:r>
-          </a:p>
-          <a:p>
-            <a:pPr marL="0" lvl="0" indent="0">
-              <a:buNone/>
+              <a:t>Нужно:</a:t>
+            </a:r>
+          </a:p>
+          <a:p>
+            <a:pPr marL="342900" lvl="0" indent="-342900">
+              <a:buAutoNum type="arabicPeriod"/>
             </a:pPr>
             <a:r>
-              <a:t>Сроки и состав обязательных триггеров проверяются по действующей редакции нормативных источников.</a:t>
+              <a:t>зафиксировать результат и основания несопоставимости;</a:t>
+            </a:r>
+          </a:p>
+          <a:p>
+            <a:pPr marL="342900" lvl="0" indent="-342900">
+              <a:buAutoNum type="arabicPeriod"/>
+            </a:pPr>
+            <a:r>
+              <a:t>проверить, предусмотрен ли действующими правилами специальный порядок для нетиповых или вновь создаваемых объектов;</a:t>
+            </a:r>
+          </a:p>
+          <a:p>
+            <a:pPr marL="342900" lvl="0" indent="-342900">
+              <a:buAutoNum type="arabicPeriod"/>
+            </a:pPr>
+            <a:r>
+              <a:t>оценить последствия по применимым показателям;</a:t>
+            </a:r>
+          </a:p>
+          <a:p>
+            <a:pPr marL="342900" lvl="0" indent="-342900">
+              <a:buAutoNum type="arabicPeriod"/>
+            </a:pPr>
+            <a:r>
+              <a:t>оформить требуемые сведения и предложение по уточнению перечня — если это предусмотрено действующей процедурой.</a:t>
             </a:r>
           </a:p>
         </p:txBody>
@@ -7022,7 +7423,7 @@
           <p:cNvPr id="4" name="Номер слайда 3">
             <a:extLst>
               <a:ext uri="{FF2B5EF4-FFF2-40B4-BE49-F238E27FC236}">
-                <a16:creationId xmlns:a16="http://schemas.microsoft.com/office/drawing/2014/main" id="{648FC81E-0DAC-41BD-8985-F46BC2A98962}"/>
+                <a16:creationId xmlns:a16="http://schemas.microsoft.com/office/drawing/2014/main" id="{DE6F4C25-1D51-4160-B5A7-8A3E50DA5C4C}"/>
               </a:ext>
             </a:extLst>
           </p:cNvPr>
